--- a/blockchain/solana_blockchain_project_ofirkrisple.pptx
+++ b/blockchain/solana_blockchain_project_ofirkrisple.pptx
@@ -16,9 +16,10 @@
     <p:sldId id="273" r:id="rId10"/>
     <p:sldId id="274" r:id="rId11"/>
     <p:sldId id="265" r:id="rId12"/>
-    <p:sldId id="276" r:id="rId13"/>
-    <p:sldId id="275" r:id="rId14"/>
-    <p:sldId id="277" r:id="rId15"/>
+    <p:sldId id="275" r:id="rId13"/>
+    <p:sldId id="276" r:id="rId14"/>
+    <p:sldId id="278" r:id="rId15"/>
+    <p:sldId id="277" r:id="rId16"/>
   </p:sldIdLst>
   <p:sldSz cx="9144000" cy="6858000" type="screen4x3"/>
   <p:notesSz cx="6858000" cy="9144000"/>
@@ -3128,13 +3129,82 @@
           <a:p>
             <a:pPr rtl="1"/>
             <a:r>
-              <a:rPr sz="4400" b="1">
-                <a:solidFill>
-                  <a:srgbClr val="FFFFFF"/>
-                </a:solidFill>
-              </a:rPr>
-              <a:t>עבודת בית 1 – בלוקצ'יין נוסח סולנה</a:t>
-            </a:r>
+              <a:rPr sz="4400" b="1" dirty="0" err="1">
+                <a:solidFill>
+                  <a:srgbClr val="FFFFFF"/>
+                </a:solidFill>
+              </a:rPr>
+              <a:t>עבודת</a:t>
+            </a:r>
+            <a:r>
+              <a:rPr sz="4400" b="1" dirty="0">
+                <a:solidFill>
+                  <a:srgbClr val="FFFFFF"/>
+                </a:solidFill>
+              </a:rPr>
+              <a:t> </a:t>
+            </a:r>
+            <a:r>
+              <a:rPr sz="4400" b="1" dirty="0" err="1">
+                <a:solidFill>
+                  <a:srgbClr val="FFFFFF"/>
+                </a:solidFill>
+              </a:rPr>
+              <a:t>בית</a:t>
+            </a:r>
+            <a:r>
+              <a:rPr sz="4400" b="1" dirty="0">
+                <a:solidFill>
+                  <a:srgbClr val="FFFFFF"/>
+                </a:solidFill>
+              </a:rPr>
+              <a:t> 1 – </a:t>
+            </a:r>
+            <a:r>
+              <a:rPr sz="4400" b="1" dirty="0" err="1">
+                <a:solidFill>
+                  <a:srgbClr val="FFFFFF"/>
+                </a:solidFill>
+              </a:rPr>
+              <a:t>בלוקצ'יין</a:t>
+            </a:r>
+            <a:r>
+              <a:rPr sz="4400" b="1" dirty="0">
+                <a:solidFill>
+                  <a:srgbClr val="FFFFFF"/>
+                </a:solidFill>
+              </a:rPr>
+              <a:t> </a:t>
+            </a:r>
+            <a:r>
+              <a:rPr sz="4400" b="1" dirty="0" err="1">
+                <a:solidFill>
+                  <a:srgbClr val="FFFFFF"/>
+                </a:solidFill>
+              </a:rPr>
+              <a:t>נוסח</a:t>
+            </a:r>
+            <a:r>
+              <a:rPr sz="4400" b="1" dirty="0">
+                <a:solidFill>
+                  <a:srgbClr val="FFFFFF"/>
+                </a:solidFill>
+              </a:rPr>
+              <a:t> </a:t>
+            </a:r>
+            <a:r>
+              <a:rPr sz="4400" b="1" dirty="0" err="1">
+                <a:solidFill>
+                  <a:srgbClr val="FFFFFF"/>
+                </a:solidFill>
+              </a:rPr>
+              <a:t>סולנה</a:t>
+            </a:r>
+            <a:endParaRPr sz="4400" b="1" dirty="0">
+              <a:solidFill>
+                <a:srgbClr val="FFFFFF"/>
+              </a:solidFill>
+            </a:endParaRPr>
           </a:p>
         </p:txBody>
       </p:sp>
@@ -3574,6 +3644,11 @@
           <a:prstGeom prst="rect">
             <a:avLst/>
           </a:prstGeom>
+          <a:ln>
+            <a:solidFill>
+              <a:schemeClr val="accent1"/>
+            </a:solidFill>
+          </a:ln>
         </p:spPr>
       </p:pic>
       <p:cxnSp>
@@ -3684,7 +3759,9 @@
           <a:prstGeom prst="rect">
             <a:avLst/>
           </a:prstGeom>
-          <a:noFill/>
+          <a:solidFill>
+            <a:srgbClr val="1E1E1E"/>
+          </a:solidFill>
           <a:ln>
             <a:solidFill>
               <a:srgbClr val="FF0000"/>
@@ -4084,7 +4161,7 @@
                   <a:srgbClr val="FFFFFF"/>
                 </a:solidFill>
               </a:rPr>
-              <a:t> לבלוק כולל </a:t>
+              <a:t> לבלוק לא כולל </a:t>
             </a:r>
             <a:r>
               <a:rPr lang="en-US" sz="1400" b="1" dirty="0" err="1">
@@ -4193,41 +4270,6 @@
           </a:p>
         </p:txBody>
       </p:sp>
-      <p:pic>
-        <p:nvPicPr>
-          <p:cNvPr id="18" name="תמונה 17">
-            <a:extLst>
-              <a:ext uri="{FF2B5EF4-FFF2-40B4-BE49-F238E27FC236}">
-                <a16:creationId xmlns:a16="http://schemas.microsoft.com/office/drawing/2014/main" id="{4CDA7381-5F7D-489D-4396-6B24B49DBE63}"/>
-              </a:ext>
-            </a:extLst>
-          </p:cNvPr>
-          <p:cNvPicPr>
-            <a:picLocks noChangeAspect="1"/>
-          </p:cNvPicPr>
-          <p:nvPr/>
-        </p:nvPicPr>
-        <p:blipFill>
-          <a:blip r:embed="rId3"/>
-          <a:stretch>
-            <a:fillRect/>
-          </a:stretch>
-        </p:blipFill>
-        <p:spPr>
-          <a:xfrm>
-            <a:off x="64463" y="3429000"/>
-            <a:ext cx="4980417" cy="2630107"/>
-          </a:xfrm>
-          <a:prstGeom prst="rect">
-            <a:avLst/>
-          </a:prstGeom>
-          <a:ln>
-            <a:solidFill>
-              <a:schemeClr val="accent1"/>
-            </a:solidFill>
-          </a:ln>
-        </p:spPr>
-      </p:pic>
       <p:sp>
         <p:nvSpPr>
           <p:cNvPr id="19" name="תיבת טקסט 18">
@@ -4415,6 +4457,126 @@
           </a:p>
         </p:txBody>
       </p:sp>
+      <p:sp>
+        <p:nvSpPr>
+          <p:cNvPr id="22" name="תיבת טקסט 21">
+            <a:extLst>
+              <a:ext uri="{FF2B5EF4-FFF2-40B4-BE49-F238E27FC236}">
+                <a16:creationId xmlns:a16="http://schemas.microsoft.com/office/drawing/2014/main" id="{E28C0FE1-F42A-939F-0D4F-877BDFD9E996}"/>
+              </a:ext>
+            </a:extLst>
+          </p:cNvPr>
+          <p:cNvSpPr txBox="1"/>
+          <p:nvPr/>
+        </p:nvSpPr>
+        <p:spPr>
+          <a:xfrm>
+            <a:off x="5447515" y="6062141"/>
+            <a:ext cx="2613536" cy="738664"/>
+          </a:xfrm>
+          <a:prstGeom prst="rect">
+            <a:avLst/>
+          </a:prstGeom>
+          <a:noFill/>
+        </p:spPr>
+        <p:txBody>
+          <a:bodyPr wrap="square" rtlCol="1">
+            <a:spAutoFit/>
+          </a:bodyPr>
+          <a:lstStyle/>
+          <a:p>
+            <a:pPr marL="0" algn="ctr" defTabSz="457200" rtl="1" eaLnBrk="1" latinLnBrk="0" hangingPunct="1"/>
+            <a:r>
+              <a:rPr lang="he-IL" sz="1400" b="1" dirty="0">
+                <a:solidFill>
+                  <a:srgbClr val="FFFFFF"/>
+                </a:solidFill>
+              </a:rPr>
+              <a:t>אתחול כל ה</a:t>
+            </a:r>
+            <a:r>
+              <a:rPr lang="en-US" sz="1400" b="1" dirty="0">
+                <a:solidFill>
+                  <a:srgbClr val="FFFFFF"/>
+                </a:solidFill>
+              </a:rPr>
+              <a:t>balance</a:t>
+            </a:r>
+            <a:r>
+              <a:rPr lang="he-IL" sz="1400" b="1" dirty="0">
+                <a:solidFill>
+                  <a:srgbClr val="FFFFFF"/>
+                </a:solidFill>
+              </a:rPr>
+              <a:t> של כל הארנקים ל100 על בסיס </a:t>
+            </a:r>
+            <a:r>
+              <a:rPr lang="he-IL" sz="1400" b="1" dirty="0" err="1">
+                <a:solidFill>
+                  <a:srgbClr val="FFFFFF"/>
+                </a:solidFill>
+              </a:rPr>
+              <a:t>הקונפיג</a:t>
+            </a:r>
+            <a:r>
+              <a:rPr lang="he-IL" sz="1400" b="1" dirty="0">
+                <a:solidFill>
+                  <a:srgbClr val="FFFFFF"/>
+                </a:solidFill>
+              </a:rPr>
+              <a:t> שהוגדר ב</a:t>
+            </a:r>
+            <a:r>
+              <a:rPr lang="en-US" sz="1400" b="1" dirty="0">
+                <a:solidFill>
+                  <a:srgbClr val="FFFFFF"/>
+                </a:solidFill>
+              </a:rPr>
+              <a:t>main</a:t>
+            </a:r>
+            <a:endParaRPr lang="he-IL" sz="1400" b="1" dirty="0">
+              <a:solidFill>
+                <a:srgbClr val="FFFFFF"/>
+              </a:solidFill>
+            </a:endParaRPr>
+          </a:p>
+        </p:txBody>
+      </p:sp>
+      <p:pic>
+        <p:nvPicPr>
+          <p:cNvPr id="4" name="תמונה 3">
+            <a:extLst>
+              <a:ext uri="{FF2B5EF4-FFF2-40B4-BE49-F238E27FC236}">
+                <a16:creationId xmlns:a16="http://schemas.microsoft.com/office/drawing/2014/main" id="{59071CFD-4E4A-991A-2931-83A4A080E2B7}"/>
+              </a:ext>
+            </a:extLst>
+          </p:cNvPr>
+          <p:cNvPicPr>
+            <a:picLocks noChangeAspect="1"/>
+          </p:cNvPicPr>
+          <p:nvPr/>
+        </p:nvPicPr>
+        <p:blipFill>
+          <a:blip r:embed="rId3"/>
+          <a:stretch>
+            <a:fillRect/>
+          </a:stretch>
+        </p:blipFill>
+        <p:spPr>
+          <a:xfrm>
+            <a:off x="64463" y="3437356"/>
+            <a:ext cx="4831565" cy="2663209"/>
+          </a:xfrm>
+          <a:prstGeom prst="rect">
+            <a:avLst/>
+          </a:prstGeom>
+          <a:ln>
+            <a:solidFill>
+              <a:schemeClr val="accent1"/>
+            </a:solidFill>
+          </a:ln>
+        </p:spPr>
+      </p:pic>
       <p:pic>
         <p:nvPicPr>
           <p:cNvPr id="23" name="תמונה 22">
@@ -4437,8 +4599,82 @@
         </p:blipFill>
         <p:spPr>
           <a:xfrm>
-            <a:off x="2117885" y="5304262"/>
+            <a:off x="2218134" y="5384208"/>
             <a:ext cx="3257026" cy="1355866"/>
+          </a:xfrm>
+          <a:prstGeom prst="rect">
+            <a:avLst/>
+          </a:prstGeom>
+          <a:ln>
+            <a:solidFill>
+              <a:schemeClr val="accent1"/>
+            </a:solidFill>
+          </a:ln>
+        </p:spPr>
+      </p:pic>
+    </p:spTree>
+  </p:cSld>
+  <p:clrMapOvr>
+    <a:masterClrMapping/>
+  </p:clrMapOvr>
+</p:sld>
+</file>
+
+<file path=ppt/slides/slide12.xml><?xml version="1.0" encoding="utf-8"?>
+<p:sld xmlns:a="http://schemas.openxmlformats.org/drawingml/2006/main" xmlns:r="http://schemas.openxmlformats.org/officeDocument/2006/relationships" xmlns:p="http://schemas.openxmlformats.org/presentationml/2006/main">
+  <p:cSld>
+    <p:bg>
+      <p:bgPr>
+        <a:solidFill>
+          <a:srgbClr val="1E1E1E"/>
+        </a:solidFill>
+        <a:effectLst/>
+      </p:bgPr>
+    </p:bg>
+    <p:spTree>
+      <p:nvGrpSpPr>
+        <p:cNvPr id="1" name="">
+          <a:extLst>
+            <a:ext uri="{FF2B5EF4-FFF2-40B4-BE49-F238E27FC236}">
+              <a16:creationId xmlns:a16="http://schemas.microsoft.com/office/drawing/2014/main" id="{0DFA7029-62D4-086A-C12A-AFBC52F59537}"/>
+            </a:ext>
+          </a:extLst>
+        </p:cNvPr>
+        <p:cNvGrpSpPr/>
+        <p:nvPr/>
+      </p:nvGrpSpPr>
+      <p:grpSpPr>
+        <a:xfrm>
+          <a:off x="0" y="0"/>
+          <a:ext cx="0" cy="0"/>
+          <a:chOff x="0" y="0"/>
+          <a:chExt cx="0" cy="0"/>
+        </a:xfrm>
+      </p:grpSpPr>
+      <p:pic>
+        <p:nvPicPr>
+          <p:cNvPr id="5" name="תמונה 4">
+            <a:extLst>
+              <a:ext uri="{FF2B5EF4-FFF2-40B4-BE49-F238E27FC236}">
+                <a16:creationId xmlns:a16="http://schemas.microsoft.com/office/drawing/2014/main" id="{8BD7FFE8-A9E9-2726-871A-6645E86ADE71}"/>
+              </a:ext>
+            </a:extLst>
+          </p:cNvPr>
+          <p:cNvPicPr>
+            <a:picLocks noChangeAspect="1"/>
+          </p:cNvPicPr>
+          <p:nvPr/>
+        </p:nvPicPr>
+        <p:blipFill>
+          <a:blip r:embed="rId2"/>
+          <a:stretch>
+            <a:fillRect/>
+          </a:stretch>
+        </p:blipFill>
+        <p:spPr>
+          <a:xfrm>
+            <a:off x="87970" y="1181316"/>
+            <a:ext cx="5699355" cy="5446711"/>
           </a:xfrm>
           <a:prstGeom prst="rect">
             <a:avLst/>
@@ -4452,10 +4688,137 @@
       </p:pic>
       <p:sp>
         <p:nvSpPr>
-          <p:cNvPr id="22" name="תיבת טקסט 21">
+          <p:cNvPr id="2" name="Title 1">
             <a:extLst>
               <a:ext uri="{FF2B5EF4-FFF2-40B4-BE49-F238E27FC236}">
-                <a16:creationId xmlns:a16="http://schemas.microsoft.com/office/drawing/2014/main" id="{E28C0FE1-F42A-939F-0D4F-877BDFD9E996}"/>
+                <a16:creationId xmlns:a16="http://schemas.microsoft.com/office/drawing/2014/main" id="{AA4EBE08-9362-F072-F144-95CFB57D7503}"/>
+              </a:ext>
+            </a:extLst>
+          </p:cNvPr>
+          <p:cNvSpPr>
+            <a:spLocks noGrp="1"/>
+          </p:cNvSpPr>
+          <p:nvPr>
+            <p:ph type="title"/>
+          </p:nvPr>
+        </p:nvSpPr>
+        <p:spPr/>
+        <p:txBody>
+          <a:bodyPr>
+            <a:normAutofit/>
+          </a:bodyPr>
+          <a:lstStyle/>
+          <a:p>
+            <a:r>
+              <a:rPr lang="he-IL" sz="3600" b="1" dirty="0">
+                <a:solidFill>
+                  <a:srgbClr val="FFFFFF"/>
+                </a:solidFill>
+              </a:rPr>
+              <a:t>כרייה – יצירת מטבעות עמלות ושירפה</a:t>
+            </a:r>
+            <a:endParaRPr sz="3600" b="1" dirty="0">
+              <a:solidFill>
+                <a:srgbClr val="FFFFFF"/>
+              </a:solidFill>
+            </a:endParaRPr>
+          </a:p>
+        </p:txBody>
+      </p:sp>
+      <p:cxnSp>
+        <p:nvCxnSpPr>
+          <p:cNvPr id="30" name="מחבר ישר 29">
+            <a:extLst>
+              <a:ext uri="{FF2B5EF4-FFF2-40B4-BE49-F238E27FC236}">
+                <a16:creationId xmlns:a16="http://schemas.microsoft.com/office/drawing/2014/main" id="{39A0745B-B914-A2FB-F699-352BAD50ECBB}"/>
+              </a:ext>
+            </a:extLst>
+          </p:cNvPr>
+          <p:cNvCxnSpPr>
+            <a:cxnSpLocks/>
+          </p:cNvCxnSpPr>
+          <p:nvPr/>
+        </p:nvCxnSpPr>
+        <p:spPr>
+          <a:xfrm flipV="1">
+            <a:off x="1362100" y="3350709"/>
+            <a:ext cx="3462315" cy="1"/>
+          </a:xfrm>
+          <a:prstGeom prst="line">
+            <a:avLst/>
+          </a:prstGeom>
+          <a:ln>
+            <a:solidFill>
+              <a:srgbClr val="FF0000"/>
+            </a:solidFill>
+            <a:headEnd type="none" w="med" len="med"/>
+            <a:tailEnd type="arrow" w="med" len="med"/>
+          </a:ln>
+        </p:spPr>
+        <p:style>
+          <a:lnRef idx="1">
+            <a:schemeClr val="accent6"/>
+          </a:lnRef>
+          <a:fillRef idx="0">
+            <a:schemeClr val="accent6"/>
+          </a:fillRef>
+          <a:effectRef idx="0">
+            <a:schemeClr val="accent6"/>
+          </a:effectRef>
+          <a:fontRef idx="minor">
+            <a:schemeClr val="tx1"/>
+          </a:fontRef>
+        </p:style>
+      </p:cxnSp>
+      <p:cxnSp>
+        <p:nvCxnSpPr>
+          <p:cNvPr id="31" name="מחבר ישר 30">
+            <a:extLst>
+              <a:ext uri="{FF2B5EF4-FFF2-40B4-BE49-F238E27FC236}">
+                <a16:creationId xmlns:a16="http://schemas.microsoft.com/office/drawing/2014/main" id="{2182BB3C-1EC2-7275-E11A-418D1C07264F}"/>
+              </a:ext>
+            </a:extLst>
+          </p:cNvPr>
+          <p:cNvCxnSpPr/>
+          <p:nvPr/>
+        </p:nvCxnSpPr>
+        <p:spPr>
+          <a:xfrm flipV="1">
+            <a:off x="1362100" y="3211279"/>
+            <a:ext cx="0" cy="139431"/>
+          </a:xfrm>
+          <a:prstGeom prst="line">
+            <a:avLst/>
+          </a:prstGeom>
+          <a:ln>
+            <a:solidFill>
+              <a:srgbClr val="FF0000"/>
+            </a:solidFill>
+            <a:headEnd type="none" w="med" len="med"/>
+            <a:tailEnd type="none" w="med" len="med"/>
+          </a:ln>
+        </p:spPr>
+        <p:style>
+          <a:lnRef idx="1">
+            <a:schemeClr val="accent6"/>
+          </a:lnRef>
+          <a:fillRef idx="0">
+            <a:schemeClr val="accent6"/>
+          </a:fillRef>
+          <a:effectRef idx="0">
+            <a:schemeClr val="accent6"/>
+          </a:effectRef>
+          <a:fontRef idx="minor">
+            <a:schemeClr val="tx1"/>
+          </a:fontRef>
+        </p:style>
+      </p:cxnSp>
+      <p:sp>
+        <p:nvSpPr>
+          <p:cNvPr id="32" name="תיבת טקסט 31">
+            <a:extLst>
+              <a:ext uri="{FF2B5EF4-FFF2-40B4-BE49-F238E27FC236}">
+                <a16:creationId xmlns:a16="http://schemas.microsoft.com/office/drawing/2014/main" id="{DFFB047C-8748-9C39-B879-4695C2252697}"/>
               </a:ext>
             </a:extLst>
           </p:cNvPr>
@@ -4464,13 +4827,20 @@
         </p:nvSpPr>
         <p:spPr>
           <a:xfrm>
-            <a:off x="5324999" y="6059107"/>
-            <a:ext cx="2613536" cy="738664"/>
+            <a:off x="4929233" y="2965989"/>
+            <a:ext cx="4009491" cy="769441"/>
           </a:xfrm>
           <a:prstGeom prst="rect">
             <a:avLst/>
           </a:prstGeom>
-          <a:noFill/>
+          <a:solidFill>
+            <a:srgbClr val="1E1E1E"/>
+          </a:solidFill>
+          <a:ln>
+            <a:solidFill>
+              <a:srgbClr val="FF0000"/>
+            </a:solidFill>
+          </a:ln>
         </p:spPr>
         <p:txBody>
           <a:bodyPr wrap="square" rtlCol="1">
@@ -4478,56 +4848,128 @@
           </a:bodyPr>
           <a:lstStyle/>
           <a:p>
-            <a:pPr marL="0" algn="ctr" defTabSz="457200" rtl="1" eaLnBrk="1" latinLnBrk="0" hangingPunct="1"/>
-            <a:r>
-              <a:rPr lang="he-IL" sz="1400" b="1" dirty="0">
-                <a:solidFill>
-                  <a:srgbClr val="FFFFFF"/>
-                </a:solidFill>
-              </a:rPr>
-              <a:t>אתחול כל ה</a:t>
-            </a:r>
-            <a:r>
-              <a:rPr lang="en-US" sz="1400" b="1" dirty="0">
-                <a:solidFill>
-                  <a:srgbClr val="FFFFFF"/>
-                </a:solidFill>
-              </a:rPr>
-              <a:t>balance</a:t>
-            </a:r>
-            <a:r>
-              <a:rPr lang="he-IL" sz="1400" b="1" dirty="0">
-                <a:solidFill>
-                  <a:srgbClr val="FFFFFF"/>
-                </a:solidFill>
-              </a:rPr>
-              <a:t> של כל הארנקים ל100 על בסיס </a:t>
-            </a:r>
-            <a:r>
-              <a:rPr lang="he-IL" sz="1400" b="1" dirty="0" err="1">
-                <a:solidFill>
-                  <a:srgbClr val="FFFFFF"/>
-                </a:solidFill>
-              </a:rPr>
-              <a:t>הקונפיג</a:t>
-            </a:r>
-            <a:r>
-              <a:rPr lang="he-IL" sz="1400" b="1" dirty="0">
-                <a:solidFill>
-                  <a:srgbClr val="FFFFFF"/>
-                </a:solidFill>
-              </a:rPr>
-              <a:t> שהוגדר ב</a:t>
-            </a:r>
-            <a:r>
-              <a:rPr lang="en-US" sz="1400" b="1" dirty="0">
+            <a:pPr algn="ctr" rtl="1"/>
+            <a:r>
+              <a:rPr lang="he-IL" sz="1100" b="1" dirty="0">
+                <a:solidFill>
+                  <a:srgbClr val="FFFFFF"/>
+                </a:solidFill>
+              </a:rPr>
+              <a:t>ה</a:t>
+            </a:r>
+            <a:r>
+              <a:rPr lang="en-US" sz="1100" b="1" dirty="0" err="1">
+                <a:solidFill>
+                  <a:srgbClr val="FFFFFF"/>
+                </a:solidFill>
+              </a:rPr>
+              <a:t>minerDcheduler</a:t>
+            </a:r>
+            <a:r>
+              <a:rPr lang="he-IL" sz="1100" b="1" dirty="0">
+                <a:solidFill>
+                  <a:srgbClr val="FFFFFF"/>
+                </a:solidFill>
+              </a:rPr>
+              <a:t> יוצר מקבץ של מקסימום 50 </a:t>
+            </a:r>
+            <a:r>
+              <a:rPr lang="he-IL" sz="1100" b="1" dirty="0" err="1">
+                <a:solidFill>
+                  <a:srgbClr val="FFFFFF"/>
+                </a:solidFill>
+              </a:rPr>
+              <a:t>טרנזקציות</a:t>
+            </a:r>
+            <a:r>
+              <a:rPr lang="he-IL" sz="1100" b="1" dirty="0">
+                <a:solidFill>
+                  <a:srgbClr val="FFFFFF"/>
+                </a:solidFill>
+              </a:rPr>
+              <a:t> לפי שהוגדר </a:t>
+            </a:r>
+            <a:r>
+              <a:rPr lang="he-IL" sz="1100" b="1" dirty="0" err="1">
+                <a:solidFill>
+                  <a:srgbClr val="FFFFFF"/>
+                </a:solidFill>
+              </a:rPr>
+              <a:t>בקונפיג</a:t>
+            </a:r>
+            <a:r>
+              <a:rPr lang="he-IL" sz="1100" b="1" dirty="0">
+                <a:solidFill>
+                  <a:srgbClr val="FFFFFF"/>
+                </a:solidFill>
+              </a:rPr>
+              <a:t> ב</a:t>
+            </a:r>
+            <a:r>
+              <a:rPr lang="en-US" sz="1100" b="1" dirty="0">
                 <a:solidFill>
                   <a:srgbClr val="FFFFFF"/>
                 </a:solidFill>
               </a:rPr>
               <a:t>main</a:t>
             </a:r>
-            <a:endParaRPr lang="he-IL" sz="1400" b="1" dirty="0">
+            <a:r>
+              <a:rPr lang="he-IL" sz="1100" b="1" dirty="0">
+                <a:solidFill>
+                  <a:srgbClr val="FFFFFF"/>
+                </a:solidFill>
+              </a:rPr>
+              <a:t> בשדה </a:t>
+            </a:r>
+            <a:r>
+              <a:rPr lang="en" sz="1100" b="1" dirty="0" err="1">
+                <a:solidFill>
+                  <a:srgbClr val="FFFFFF"/>
+                </a:solidFill>
+              </a:rPr>
+              <a:t>transactionsPerBlock</a:t>
+            </a:r>
+            <a:r>
+              <a:rPr lang="he-IL" sz="1100" b="1" dirty="0">
+                <a:solidFill>
+                  <a:srgbClr val="FFFFFF"/>
+                </a:solidFill>
+              </a:rPr>
+              <a:t>, אם אין עוד מספיק </a:t>
+            </a:r>
+            <a:r>
+              <a:rPr lang="he-IL" sz="1100" b="1" dirty="0" err="1">
+                <a:solidFill>
+                  <a:srgbClr val="FFFFFF"/>
+                </a:solidFill>
+              </a:rPr>
+              <a:t>טרנזקציות</a:t>
+            </a:r>
+            <a:r>
+              <a:rPr lang="he-IL" sz="1100" b="1" dirty="0">
+                <a:solidFill>
+                  <a:srgbClr val="FFFFFF"/>
+                </a:solidFill>
+              </a:rPr>
+              <a:t> במאגר יצא מקבץ קצר יותר, מקבץ זה עובר ל</a:t>
+            </a:r>
+            <a:r>
+              <a:rPr lang="en-US" sz="1100" b="1" dirty="0">
+                <a:solidFill>
+                  <a:srgbClr val="FFFFFF"/>
+                </a:solidFill>
+              </a:rPr>
+              <a:t>miner</a:t>
+            </a:r>
+            <a:r>
+              <a:rPr lang="he-IL" sz="1100" b="1" dirty="0">
+                <a:solidFill>
+                  <a:srgbClr val="FFFFFF"/>
+                </a:solidFill>
+              </a:rPr>
+              <a:t> שיכניס אותן לבלוק בתהליך הכרייה.</a:t>
+            </a:r>
+            <a:endParaRPr lang="en" sz="1100" b="1" dirty="0">
               <a:solidFill>
                 <a:srgbClr val="FFFFFF"/>
               </a:solidFill>
@@ -4535,7 +4977,451 @@
           </a:p>
         </p:txBody>
       </p:sp>
+      <p:pic>
+        <p:nvPicPr>
+          <p:cNvPr id="6" name="תמונה 5">
+            <a:extLst>
+              <a:ext uri="{FF2B5EF4-FFF2-40B4-BE49-F238E27FC236}">
+                <a16:creationId xmlns:a16="http://schemas.microsoft.com/office/drawing/2014/main" id="{D4789D02-91A8-E111-1FAA-85BFBA84C385}"/>
+              </a:ext>
+            </a:extLst>
+          </p:cNvPr>
+          <p:cNvPicPr>
+            <a:picLocks noChangeAspect="1"/>
+          </p:cNvPicPr>
+          <p:nvPr/>
+        </p:nvPicPr>
+        <p:blipFill>
+          <a:blip r:embed="rId3"/>
+          <a:stretch>
+            <a:fillRect/>
+          </a:stretch>
+        </p:blipFill>
+        <p:spPr>
+          <a:xfrm>
+            <a:off x="4929233" y="4074061"/>
+            <a:ext cx="3780996" cy="1739392"/>
+          </a:xfrm>
+          <a:prstGeom prst="rect">
+            <a:avLst/>
+          </a:prstGeom>
+          <a:ln>
+            <a:solidFill>
+              <a:schemeClr val="accent1"/>
+            </a:solidFill>
+          </a:ln>
+        </p:spPr>
+      </p:pic>
+      <p:cxnSp>
+        <p:nvCxnSpPr>
+          <p:cNvPr id="7" name="מחבר ישר 6">
+            <a:extLst>
+              <a:ext uri="{FF2B5EF4-FFF2-40B4-BE49-F238E27FC236}">
+                <a16:creationId xmlns:a16="http://schemas.microsoft.com/office/drawing/2014/main" id="{9BB3C227-9E9E-7544-F873-A565E445F8C1}"/>
+              </a:ext>
+            </a:extLst>
+          </p:cNvPr>
+          <p:cNvCxnSpPr>
+            <a:cxnSpLocks/>
+          </p:cNvCxnSpPr>
+          <p:nvPr/>
+        </p:nvCxnSpPr>
+        <p:spPr>
+          <a:xfrm>
+            <a:off x="6283928" y="3735715"/>
+            <a:ext cx="0" cy="367559"/>
+          </a:xfrm>
+          <a:prstGeom prst="line">
+            <a:avLst/>
+          </a:prstGeom>
+          <a:ln>
+            <a:solidFill>
+              <a:srgbClr val="FF0000"/>
+            </a:solidFill>
+            <a:headEnd type="none" w="med" len="med"/>
+            <a:tailEnd type="arrow" w="med" len="med"/>
+          </a:ln>
+        </p:spPr>
+        <p:style>
+          <a:lnRef idx="1">
+            <a:schemeClr val="accent6"/>
+          </a:lnRef>
+          <a:fillRef idx="0">
+            <a:schemeClr val="accent6"/>
+          </a:fillRef>
+          <a:effectRef idx="0">
+            <a:schemeClr val="accent6"/>
+          </a:effectRef>
+          <a:fontRef idx="minor">
+            <a:schemeClr val="tx1"/>
+          </a:fontRef>
+        </p:style>
+      </p:cxnSp>
+      <p:sp>
+        <p:nvSpPr>
+          <p:cNvPr id="9" name="מלבן 8">
+            <a:extLst>
+              <a:ext uri="{FF2B5EF4-FFF2-40B4-BE49-F238E27FC236}">
+                <a16:creationId xmlns:a16="http://schemas.microsoft.com/office/drawing/2014/main" id="{E5D36475-D04A-3A07-9FB2-6E98BE18A779}"/>
+              </a:ext>
+            </a:extLst>
+          </p:cNvPr>
+          <p:cNvSpPr/>
+          <p:nvPr/>
+        </p:nvSpPr>
+        <p:spPr>
+          <a:xfrm>
+            <a:off x="740228" y="4695091"/>
+            <a:ext cx="2245967" cy="1226737"/>
+          </a:xfrm>
+          <a:prstGeom prst="rect">
+            <a:avLst/>
+          </a:prstGeom>
+          <a:noFill/>
+          <a:ln>
+            <a:solidFill>
+              <a:srgbClr val="FF0000"/>
+            </a:solidFill>
+          </a:ln>
+        </p:spPr>
+        <p:style>
+          <a:lnRef idx="1">
+            <a:schemeClr val="accent1"/>
+          </a:lnRef>
+          <a:fillRef idx="3">
+            <a:schemeClr val="accent1"/>
+          </a:fillRef>
+          <a:effectRef idx="2">
+            <a:schemeClr val="accent1"/>
+          </a:effectRef>
+          <a:fontRef idx="minor">
+            <a:schemeClr val="lt1"/>
+          </a:fontRef>
+        </p:style>
+        <p:txBody>
+          <a:bodyPr rtlCol="1" anchor="ctr"/>
+          <a:lstStyle/>
+          <a:p>
+            <a:pPr marL="0" algn="ctr" defTabSz="457200" rtl="0" eaLnBrk="1" latinLnBrk="0" hangingPunct="1"/>
+            <a:endParaRPr lang="he-IL"/>
+          </a:p>
+        </p:txBody>
+      </p:sp>
+      <p:sp>
+        <p:nvSpPr>
+          <p:cNvPr id="10" name="תיבת טקסט 9">
+            <a:extLst>
+              <a:ext uri="{FF2B5EF4-FFF2-40B4-BE49-F238E27FC236}">
+                <a16:creationId xmlns:a16="http://schemas.microsoft.com/office/drawing/2014/main" id="{19A2402E-D615-26DF-DB37-5E1658CA70AE}"/>
+              </a:ext>
+            </a:extLst>
+          </p:cNvPr>
+          <p:cNvSpPr txBox="1"/>
+          <p:nvPr/>
+        </p:nvSpPr>
+        <p:spPr>
+          <a:xfrm>
+            <a:off x="3156475" y="5201209"/>
+            <a:ext cx="1667940" cy="1277273"/>
+          </a:xfrm>
+          <a:prstGeom prst="rect">
+            <a:avLst/>
+          </a:prstGeom>
+          <a:solidFill>
+            <a:srgbClr val="1E1E1E"/>
+          </a:solidFill>
+          <a:ln>
+            <a:solidFill>
+              <a:srgbClr val="FF0000"/>
+            </a:solidFill>
+          </a:ln>
+        </p:spPr>
+        <p:txBody>
+          <a:bodyPr wrap="square" rtlCol="1">
+            <a:spAutoFit/>
+          </a:bodyPr>
+          <a:lstStyle/>
+          <a:p>
+            <a:pPr algn="ctr" rtl="1"/>
+            <a:r>
+              <a:rPr lang="he-IL" sz="1100" b="1" dirty="0">
+                <a:solidFill>
+                  <a:srgbClr val="FFFFFF"/>
+                </a:solidFill>
+              </a:rPr>
+              <a:t>יצירת </a:t>
+            </a:r>
+            <a:r>
+              <a:rPr lang="he-IL" sz="1100" b="1" dirty="0" err="1">
+                <a:solidFill>
+                  <a:srgbClr val="FFFFFF"/>
+                </a:solidFill>
+              </a:rPr>
+              <a:t>טרנזקציית</a:t>
+            </a:r>
+            <a:r>
+              <a:rPr lang="he-IL" sz="1100" b="1" dirty="0">
+                <a:solidFill>
+                  <a:srgbClr val="FFFFFF"/>
+                </a:solidFill>
+              </a:rPr>
+              <a:t> </a:t>
+            </a:r>
+            <a:r>
+              <a:rPr lang="en-US" sz="1100" b="1" dirty="0" err="1">
+                <a:solidFill>
+                  <a:srgbClr val="FFFFFF"/>
+                </a:solidFill>
+              </a:rPr>
+              <a:t>coinbase</a:t>
+            </a:r>
+            <a:r>
+              <a:rPr lang="en-US" sz="1100" b="1" dirty="0">
+                <a:solidFill>
+                  <a:srgbClr val="FFFFFF"/>
+                </a:solidFill>
+              </a:rPr>
+              <a:t> </a:t>
+            </a:r>
+            <a:r>
+              <a:rPr lang="he-IL" sz="1100" b="1" dirty="0">
+                <a:solidFill>
+                  <a:srgbClr val="FFFFFF"/>
+                </a:solidFill>
+              </a:rPr>
+              <a:t> המכילה תגמול שמוגדר </a:t>
+            </a:r>
+            <a:r>
+              <a:rPr lang="he-IL" sz="1100" b="1" dirty="0" err="1">
+                <a:solidFill>
+                  <a:srgbClr val="FFFFFF"/>
+                </a:solidFill>
+              </a:rPr>
+              <a:t>מקונפיג</a:t>
+            </a:r>
+            <a:r>
+              <a:rPr lang="he-IL" sz="1100" b="1" dirty="0">
+                <a:solidFill>
+                  <a:srgbClr val="FFFFFF"/>
+                </a:solidFill>
+              </a:rPr>
+              <a:t>(60) ואת סך כל הטיפים שנאספו </a:t>
+            </a:r>
+            <a:r>
+              <a:rPr lang="he-IL" sz="1100" b="1" dirty="0" err="1">
+                <a:solidFill>
+                  <a:srgbClr val="FFFFFF"/>
+                </a:solidFill>
+              </a:rPr>
+              <a:t>מהטרנזקציות</a:t>
+            </a:r>
+            <a:r>
+              <a:rPr lang="he-IL" sz="1100" b="1" dirty="0">
+                <a:solidFill>
+                  <a:srgbClr val="FFFFFF"/>
+                </a:solidFill>
+              </a:rPr>
+              <a:t> שנכנסו לבלוק, והכנסתה לסוף התור.</a:t>
+            </a:r>
+            <a:endParaRPr lang="en" sz="1100" b="1" dirty="0">
+              <a:solidFill>
+                <a:srgbClr val="FFFFFF"/>
+              </a:solidFill>
+            </a:endParaRPr>
+          </a:p>
+        </p:txBody>
+      </p:sp>
+      <p:cxnSp>
+        <p:nvCxnSpPr>
+          <p:cNvPr id="11" name="מחבר ישר 10">
+            <a:extLst>
+              <a:ext uri="{FF2B5EF4-FFF2-40B4-BE49-F238E27FC236}">
+                <a16:creationId xmlns:a16="http://schemas.microsoft.com/office/drawing/2014/main" id="{134FDDA8-D1A9-9255-0F33-22B63F9ABE48}"/>
+              </a:ext>
+            </a:extLst>
+          </p:cNvPr>
+          <p:cNvCxnSpPr>
+            <a:cxnSpLocks/>
+          </p:cNvCxnSpPr>
+          <p:nvPr/>
+        </p:nvCxnSpPr>
+        <p:spPr>
+          <a:xfrm>
+            <a:off x="2986195" y="5625825"/>
+            <a:ext cx="170280" cy="0"/>
+          </a:xfrm>
+          <a:prstGeom prst="line">
+            <a:avLst/>
+          </a:prstGeom>
+          <a:ln>
+            <a:solidFill>
+              <a:srgbClr val="FF0000"/>
+            </a:solidFill>
+            <a:headEnd type="none" w="med" len="med"/>
+            <a:tailEnd type="arrow" w="med" len="med"/>
+          </a:ln>
+        </p:spPr>
+        <p:style>
+          <a:lnRef idx="1">
+            <a:schemeClr val="accent6"/>
+          </a:lnRef>
+          <a:fillRef idx="0">
+            <a:schemeClr val="accent6"/>
+          </a:fillRef>
+          <a:effectRef idx="0">
+            <a:schemeClr val="accent6"/>
+          </a:effectRef>
+          <a:fontRef idx="minor">
+            <a:schemeClr val="tx1"/>
+          </a:fontRef>
+        </p:style>
+      </p:cxnSp>
+      <p:cxnSp>
+        <p:nvCxnSpPr>
+          <p:cNvPr id="16" name="מחבר ישר 15">
+            <a:extLst>
+              <a:ext uri="{FF2B5EF4-FFF2-40B4-BE49-F238E27FC236}">
+                <a16:creationId xmlns:a16="http://schemas.microsoft.com/office/drawing/2014/main" id="{8D7BD6B3-A3D0-9541-729D-80002AFFA8F7}"/>
+              </a:ext>
+            </a:extLst>
+          </p:cNvPr>
+          <p:cNvCxnSpPr>
+            <a:cxnSpLocks/>
+          </p:cNvCxnSpPr>
+          <p:nvPr/>
+        </p:nvCxnSpPr>
+        <p:spPr>
+          <a:xfrm>
+            <a:off x="2151966" y="3772198"/>
+            <a:ext cx="1312203" cy="0"/>
+          </a:xfrm>
+          <a:prstGeom prst="line">
+            <a:avLst/>
+          </a:prstGeom>
+          <a:ln>
+            <a:solidFill>
+              <a:srgbClr val="FF0000"/>
+            </a:solidFill>
+            <a:headEnd type="none" w="med" len="med"/>
+            <a:tailEnd type="arrow" w="med" len="med"/>
+          </a:ln>
+        </p:spPr>
+        <p:style>
+          <a:lnRef idx="1">
+            <a:schemeClr val="accent6"/>
+          </a:lnRef>
+          <a:fillRef idx="0">
+            <a:schemeClr val="accent6"/>
+          </a:fillRef>
+          <a:effectRef idx="0">
+            <a:schemeClr val="accent6"/>
+          </a:effectRef>
+          <a:fontRef idx="minor">
+            <a:schemeClr val="tx1"/>
+          </a:fontRef>
+        </p:style>
+      </p:cxnSp>
+      <p:cxnSp>
+        <p:nvCxnSpPr>
+          <p:cNvPr id="17" name="מחבר ישר 16">
+            <a:extLst>
+              <a:ext uri="{FF2B5EF4-FFF2-40B4-BE49-F238E27FC236}">
+                <a16:creationId xmlns:a16="http://schemas.microsoft.com/office/drawing/2014/main" id="{B70D4FBC-3FF4-EC47-4DA3-6DD12A673761}"/>
+              </a:ext>
+            </a:extLst>
+          </p:cNvPr>
+          <p:cNvCxnSpPr/>
+          <p:nvPr/>
+        </p:nvCxnSpPr>
+        <p:spPr>
+          <a:xfrm flipV="1">
+            <a:off x="2151966" y="3632767"/>
+            <a:ext cx="0" cy="139431"/>
+          </a:xfrm>
+          <a:prstGeom prst="line">
+            <a:avLst/>
+          </a:prstGeom>
+          <a:ln>
+            <a:solidFill>
+              <a:srgbClr val="FF0000"/>
+            </a:solidFill>
+            <a:headEnd type="none" w="med" len="med"/>
+            <a:tailEnd type="none" w="med" len="med"/>
+          </a:ln>
+        </p:spPr>
+        <p:style>
+          <a:lnRef idx="1">
+            <a:schemeClr val="accent6"/>
+          </a:lnRef>
+          <a:fillRef idx="0">
+            <a:schemeClr val="accent6"/>
+          </a:fillRef>
+          <a:effectRef idx="0">
+            <a:schemeClr val="accent6"/>
+          </a:effectRef>
+          <a:fontRef idx="minor">
+            <a:schemeClr val="tx1"/>
+          </a:fontRef>
+        </p:style>
+      </p:cxnSp>
+      <p:sp>
+        <p:nvSpPr>
+          <p:cNvPr id="19" name="תיבת טקסט 18">
+            <a:extLst>
+              <a:ext uri="{FF2B5EF4-FFF2-40B4-BE49-F238E27FC236}">
+                <a16:creationId xmlns:a16="http://schemas.microsoft.com/office/drawing/2014/main" id="{733EF56D-7C91-13CF-6D72-12DAC3D20BE9}"/>
+              </a:ext>
+            </a:extLst>
+          </p:cNvPr>
+          <p:cNvSpPr txBox="1"/>
+          <p:nvPr/>
+        </p:nvSpPr>
+        <p:spPr>
+          <a:xfrm>
+            <a:off x="3507346" y="3630417"/>
+            <a:ext cx="1225848" cy="261610"/>
+          </a:xfrm>
+          <a:prstGeom prst="rect">
+            <a:avLst/>
+          </a:prstGeom>
+          <a:solidFill>
+            <a:srgbClr val="1E1E1E"/>
+          </a:solidFill>
+          <a:ln>
+            <a:solidFill>
+              <a:srgbClr val="FF0000"/>
+            </a:solidFill>
+          </a:ln>
+        </p:spPr>
+        <p:txBody>
+          <a:bodyPr wrap="square" rtlCol="1">
+            <a:spAutoFit/>
+          </a:bodyPr>
+          <a:lstStyle/>
+          <a:p>
+            <a:pPr algn="ctr" rtl="1"/>
+            <a:r>
+              <a:rPr lang="he-IL" sz="1100" b="1" dirty="0">
+                <a:solidFill>
+                  <a:srgbClr val="FFFFFF"/>
+                </a:solidFill>
+              </a:rPr>
+              <a:t>מוסבר בשקף הבא</a:t>
+            </a:r>
+            <a:endParaRPr lang="en" sz="1100" b="1" dirty="0">
+              <a:solidFill>
+                <a:srgbClr val="FFFFFF"/>
+              </a:solidFill>
+            </a:endParaRPr>
+          </a:p>
+        </p:txBody>
+      </p:sp>
     </p:spTree>
+    <p:extLst>
+      <p:ext uri="{BB962C8B-B14F-4D97-AF65-F5344CB8AC3E}">
+        <p14:creationId xmlns:p14="http://schemas.microsoft.com/office/powerpoint/2010/main" val="4214760885"/>
+      </p:ext>
+    </p:extLst>
   </p:cSld>
   <p:clrMapOvr>
     <a:masterClrMapping/>
@@ -4543,7 +5429,7 @@
 </p:sld>
 </file>
 
-<file path=ppt/slides/slide12.xml><?xml version="1.0" encoding="utf-8"?>
+<file path=ppt/slides/slide13.xml><?xml version="1.0" encoding="utf-8"?>
 <p:sld xmlns:a="http://schemas.openxmlformats.org/drawingml/2006/main" xmlns:r="http://schemas.openxmlformats.org/officeDocument/2006/relationships" xmlns:p="http://schemas.openxmlformats.org/presentationml/2006/main">
   <p:cSld>
     <p:bg>
@@ -4613,41 +5499,6 @@
           </a:p>
         </p:txBody>
       </p:sp>
-      <p:pic>
-        <p:nvPicPr>
-          <p:cNvPr id="5" name="תמונה 4">
-            <a:extLst>
-              <a:ext uri="{FF2B5EF4-FFF2-40B4-BE49-F238E27FC236}">
-                <a16:creationId xmlns:a16="http://schemas.microsoft.com/office/drawing/2014/main" id="{55F0F100-A5DE-9192-DDFF-32D335A9EB2C}"/>
-              </a:ext>
-            </a:extLst>
-          </p:cNvPr>
-          <p:cNvPicPr>
-            <a:picLocks noChangeAspect="1"/>
-          </p:cNvPicPr>
-          <p:nvPr/>
-        </p:nvPicPr>
-        <p:blipFill>
-          <a:blip r:embed="rId2"/>
-          <a:stretch>
-            <a:fillRect/>
-          </a:stretch>
-        </p:blipFill>
-        <p:spPr>
-          <a:xfrm>
-            <a:off x="159296" y="1417638"/>
-            <a:ext cx="4752769" cy="3477134"/>
-          </a:xfrm>
-          <a:prstGeom prst="rect">
-            <a:avLst/>
-          </a:prstGeom>
-          <a:ln>
-            <a:solidFill>
-              <a:schemeClr val="accent1"/>
-            </a:solidFill>
-          </a:ln>
-        </p:spPr>
-      </p:pic>
       <p:sp>
         <p:nvSpPr>
           <p:cNvPr id="15" name="תיבת טקסט 14">
@@ -4695,10 +5546,45 @@
       </p:sp>
       <p:pic>
         <p:nvPicPr>
-          <p:cNvPr id="3" name="תמונה 2">
+          <p:cNvPr id="4" name="תמונה 3">
             <a:extLst>
               <a:ext uri="{FF2B5EF4-FFF2-40B4-BE49-F238E27FC236}">
-                <a16:creationId xmlns:a16="http://schemas.microsoft.com/office/drawing/2014/main" id="{5A52BEF0-C6B5-42D9-D8AA-B993B1A19F60}"/>
+                <a16:creationId xmlns:a16="http://schemas.microsoft.com/office/drawing/2014/main" id="{4D05C185-F9CE-37A8-00FC-42B258908569}"/>
+              </a:ext>
+            </a:extLst>
+          </p:cNvPr>
+          <p:cNvPicPr>
+            <a:picLocks noChangeAspect="1"/>
+          </p:cNvPicPr>
+          <p:nvPr/>
+        </p:nvPicPr>
+        <p:blipFill>
+          <a:blip r:embed="rId2"/>
+          <a:stretch>
+            <a:fillRect/>
+          </a:stretch>
+        </p:blipFill>
+        <p:spPr>
+          <a:xfrm>
+            <a:off x="69193" y="1417638"/>
+            <a:ext cx="5220193" cy="3477134"/>
+          </a:xfrm>
+          <a:prstGeom prst="rect">
+            <a:avLst/>
+          </a:prstGeom>
+          <a:ln>
+            <a:solidFill>
+              <a:schemeClr val="accent1"/>
+            </a:solidFill>
+          </a:ln>
+        </p:spPr>
+      </p:pic>
+      <p:pic>
+        <p:nvPicPr>
+          <p:cNvPr id="6" name="תמונה 5">
+            <a:extLst>
+              <a:ext uri="{FF2B5EF4-FFF2-40B4-BE49-F238E27FC236}">
+                <a16:creationId xmlns:a16="http://schemas.microsoft.com/office/drawing/2014/main" id="{26B1AC69-CB32-CBAB-97D7-8AD067B0AB68}"/>
               </a:ext>
             </a:extLst>
           </p:cNvPr>
@@ -4715,318 +5601,8 @@
         </p:blipFill>
         <p:spPr>
           <a:xfrm>
-            <a:off x="3638912" y="2852034"/>
-            <a:ext cx="5047888" cy="3799740"/>
-          </a:xfrm>
-          <a:prstGeom prst="rect">
-            <a:avLst/>
-          </a:prstGeom>
-          <a:ln>
-            <a:solidFill>
-              <a:schemeClr val="accent1"/>
-            </a:solidFill>
-          </a:ln>
-        </p:spPr>
-      </p:pic>
-    </p:spTree>
-    <p:extLst>
-      <p:ext uri="{BB962C8B-B14F-4D97-AF65-F5344CB8AC3E}">
-        <p14:creationId xmlns:p14="http://schemas.microsoft.com/office/powerpoint/2010/main" val="1717710796"/>
-      </p:ext>
-    </p:extLst>
-  </p:cSld>
-  <p:clrMapOvr>
-    <a:masterClrMapping/>
-  </p:clrMapOvr>
-</p:sld>
-</file>
-
-<file path=ppt/slides/slide13.xml><?xml version="1.0" encoding="utf-8"?>
-<p:sld xmlns:a="http://schemas.openxmlformats.org/drawingml/2006/main" xmlns:r="http://schemas.openxmlformats.org/officeDocument/2006/relationships" xmlns:p="http://schemas.openxmlformats.org/presentationml/2006/main">
-  <p:cSld>
-    <p:bg>
-      <p:bgPr>
-        <a:solidFill>
-          <a:srgbClr val="1E1E1E"/>
-        </a:solidFill>
-        <a:effectLst/>
-      </p:bgPr>
-    </p:bg>
-    <p:spTree>
-      <p:nvGrpSpPr>
-        <p:cNvPr id="1" name="">
-          <a:extLst>
-            <a:ext uri="{FF2B5EF4-FFF2-40B4-BE49-F238E27FC236}">
-              <a16:creationId xmlns:a16="http://schemas.microsoft.com/office/drawing/2014/main" id="{0DFA7029-62D4-086A-C12A-AFBC52F59537}"/>
-            </a:ext>
-          </a:extLst>
-        </p:cNvPr>
-        <p:cNvGrpSpPr/>
-        <p:nvPr/>
-      </p:nvGrpSpPr>
-      <p:grpSpPr>
-        <a:xfrm>
-          <a:off x="0" y="0"/>
-          <a:ext cx="0" cy="0"/>
-          <a:chOff x="0" y="0"/>
-          <a:chExt cx="0" cy="0"/>
-        </a:xfrm>
-      </p:grpSpPr>
-      <p:sp>
-        <p:nvSpPr>
-          <p:cNvPr id="2" name="Title 1">
-            <a:extLst>
-              <a:ext uri="{FF2B5EF4-FFF2-40B4-BE49-F238E27FC236}">
-                <a16:creationId xmlns:a16="http://schemas.microsoft.com/office/drawing/2014/main" id="{AA4EBE08-9362-F072-F144-95CFB57D7503}"/>
-              </a:ext>
-            </a:extLst>
-          </p:cNvPr>
-          <p:cNvSpPr>
-            <a:spLocks noGrp="1"/>
-          </p:cNvSpPr>
-          <p:nvPr>
-            <p:ph type="title"/>
-          </p:nvPr>
-        </p:nvSpPr>
-        <p:spPr/>
-        <p:txBody>
-          <a:bodyPr>
-            <a:normAutofit/>
-          </a:bodyPr>
-          <a:lstStyle/>
-          <a:p>
-            <a:r>
-              <a:rPr lang="he-IL" sz="3600" b="1" dirty="0">
-                <a:solidFill>
-                  <a:srgbClr val="FFFFFF"/>
-                </a:solidFill>
-              </a:rPr>
-              <a:t>כרייה – יצירת מטבעות עמלות ושירפה</a:t>
-            </a:r>
-            <a:endParaRPr sz="3600" b="1" dirty="0">
-              <a:solidFill>
-                <a:srgbClr val="FFFFFF"/>
-              </a:solidFill>
-            </a:endParaRPr>
-          </a:p>
-        </p:txBody>
-      </p:sp>
-      <p:pic>
-        <p:nvPicPr>
-          <p:cNvPr id="29" name="תמונה 28">
-            <a:extLst>
-              <a:ext uri="{FF2B5EF4-FFF2-40B4-BE49-F238E27FC236}">
-                <a16:creationId xmlns:a16="http://schemas.microsoft.com/office/drawing/2014/main" id="{40BFF72C-3B99-9DC1-E0A8-9C4B8E65901F}"/>
-              </a:ext>
-            </a:extLst>
-          </p:cNvPr>
-          <p:cNvPicPr>
-            <a:picLocks noChangeAspect="1"/>
-          </p:cNvPicPr>
-          <p:nvPr/>
-        </p:nvPicPr>
-        <p:blipFill>
-          <a:blip r:embed="rId2"/>
-          <a:stretch>
-            <a:fillRect/>
-          </a:stretch>
-        </p:blipFill>
-        <p:spPr>
-          <a:xfrm>
-            <a:off x="87970" y="1146971"/>
-            <a:ext cx="6539454" cy="5556399"/>
-          </a:xfrm>
-          <a:prstGeom prst="rect">
-            <a:avLst/>
-          </a:prstGeom>
-          <a:ln>
-            <a:solidFill>
-              <a:schemeClr val="accent1"/>
-            </a:solidFill>
-          </a:ln>
-        </p:spPr>
-      </p:pic>
-      <p:sp>
-        <p:nvSpPr>
-          <p:cNvPr id="12" name="תיבת טקסט 11">
-            <a:extLst>
-              <a:ext uri="{FF2B5EF4-FFF2-40B4-BE49-F238E27FC236}">
-                <a16:creationId xmlns:a16="http://schemas.microsoft.com/office/drawing/2014/main" id="{5FABA596-5377-4AA1-0AD9-631D5081ABE6}"/>
-              </a:ext>
-            </a:extLst>
-          </p:cNvPr>
-          <p:cNvSpPr txBox="1"/>
-          <p:nvPr/>
-        </p:nvSpPr>
-        <p:spPr>
-          <a:xfrm>
-            <a:off x="6763923" y="5620894"/>
-            <a:ext cx="2428606" cy="276999"/>
-          </a:xfrm>
-          <a:prstGeom prst="rect">
-            <a:avLst/>
-          </a:prstGeom>
-          <a:noFill/>
-        </p:spPr>
-        <p:txBody>
-          <a:bodyPr wrap="square" rtlCol="1">
-            <a:spAutoFit/>
-          </a:bodyPr>
-          <a:lstStyle/>
-          <a:p>
-            <a:pPr algn="r" rtl="1"/>
-            <a:r>
-              <a:rPr lang="he-IL" sz="1200" b="1" dirty="0">
-                <a:solidFill>
-                  <a:srgbClr val="FFFFFF"/>
-                </a:solidFill>
-              </a:rPr>
-              <a:t>תיעוד </a:t>
-            </a:r>
-            <a:r>
-              <a:rPr lang="he-IL" sz="1200" b="1" dirty="0" err="1">
-                <a:solidFill>
-                  <a:srgbClr val="FFFFFF"/>
-                </a:solidFill>
-              </a:rPr>
-              <a:t>הטרנזקציה</a:t>
-            </a:r>
-            <a:r>
-              <a:rPr lang="he-IL" sz="1200" b="1" dirty="0">
-                <a:solidFill>
-                  <a:srgbClr val="FFFFFF"/>
-                </a:solidFill>
-              </a:rPr>
-              <a:t> והעמלה שנשרפת</a:t>
-            </a:r>
-            <a:endParaRPr lang="en" sz="1200" b="1" dirty="0">
-              <a:solidFill>
-                <a:srgbClr val="FFFFFF"/>
-              </a:solidFill>
-            </a:endParaRPr>
-          </a:p>
-        </p:txBody>
-      </p:sp>
-      <p:sp>
-        <p:nvSpPr>
-          <p:cNvPr id="26" name="תיבת טקסט 25">
-            <a:extLst>
-              <a:ext uri="{FF2B5EF4-FFF2-40B4-BE49-F238E27FC236}">
-                <a16:creationId xmlns:a16="http://schemas.microsoft.com/office/drawing/2014/main" id="{F4A89F2A-4CEC-E84D-A15D-4FB935D300DB}"/>
-              </a:ext>
-            </a:extLst>
-          </p:cNvPr>
-          <p:cNvSpPr txBox="1"/>
-          <p:nvPr/>
-        </p:nvSpPr>
-        <p:spPr>
-          <a:xfrm>
-            <a:off x="5335259" y="2288136"/>
-            <a:ext cx="3803898" cy="276999"/>
-          </a:xfrm>
-          <a:prstGeom prst="rect">
-            <a:avLst/>
-          </a:prstGeom>
-          <a:noFill/>
-        </p:spPr>
-        <p:txBody>
-          <a:bodyPr wrap="square" rtlCol="1">
-            <a:spAutoFit/>
-          </a:bodyPr>
-          <a:lstStyle/>
-          <a:p>
-            <a:pPr algn="ctr" rtl="1"/>
-            <a:r>
-              <a:rPr lang="he-IL" sz="1200" b="1" dirty="0">
-                <a:solidFill>
-                  <a:srgbClr val="FFFFFF"/>
-                </a:solidFill>
-              </a:rPr>
-              <a:t>המשך הפונקציה – יצירת </a:t>
-            </a:r>
-            <a:r>
-              <a:rPr lang="he-IL" sz="1200" b="1" dirty="0" err="1">
-                <a:solidFill>
-                  <a:srgbClr val="FFFFFF"/>
-                </a:solidFill>
-              </a:rPr>
-              <a:t>הטרנזקציה</a:t>
-            </a:r>
-            <a:r>
-              <a:rPr lang="he-IL" sz="1200" b="1" dirty="0">
-                <a:solidFill>
-                  <a:srgbClr val="FFFFFF"/>
-                </a:solidFill>
-              </a:rPr>
-              <a:t> של הכורה עם הטיפים</a:t>
-            </a:r>
-            <a:endParaRPr lang="en" sz="1200" b="1" dirty="0">
-              <a:solidFill>
-                <a:srgbClr val="FFFFFF"/>
-              </a:solidFill>
-            </a:endParaRPr>
-          </a:p>
-        </p:txBody>
-      </p:sp>
-      <p:pic>
-        <p:nvPicPr>
-          <p:cNvPr id="27" name="תמונה 26">
-            <a:extLst>
-              <a:ext uri="{FF2B5EF4-FFF2-40B4-BE49-F238E27FC236}">
-                <a16:creationId xmlns:a16="http://schemas.microsoft.com/office/drawing/2014/main" id="{262F97A6-94B2-DD74-F95D-194E86ABEEA3}"/>
-              </a:ext>
-            </a:extLst>
-          </p:cNvPr>
-          <p:cNvPicPr>
-            <a:picLocks noChangeAspect="1"/>
-          </p:cNvPicPr>
-          <p:nvPr/>
-        </p:nvPicPr>
-        <p:blipFill>
-          <a:blip r:embed="rId3"/>
-          <a:stretch>
-            <a:fillRect/>
-          </a:stretch>
-        </p:blipFill>
-        <p:spPr>
-          <a:xfrm>
-            <a:off x="4903599" y="2524975"/>
-            <a:ext cx="4152431" cy="1534594"/>
-          </a:xfrm>
-          <a:prstGeom prst="rect">
-            <a:avLst/>
-          </a:prstGeom>
-          <a:ln>
-            <a:solidFill>
-              <a:schemeClr val="accent1"/>
-            </a:solidFill>
-          </a:ln>
-        </p:spPr>
-      </p:pic>
-      <p:pic>
-        <p:nvPicPr>
-          <p:cNvPr id="28" name="תמונה 27">
-            <a:extLst>
-              <a:ext uri="{FF2B5EF4-FFF2-40B4-BE49-F238E27FC236}">
-                <a16:creationId xmlns:a16="http://schemas.microsoft.com/office/drawing/2014/main" id="{4508401B-99AB-C357-4988-A1FF6CF37127}"/>
-              </a:ext>
-            </a:extLst>
-          </p:cNvPr>
-          <p:cNvPicPr>
-            <a:picLocks noChangeAspect="1"/>
-          </p:cNvPicPr>
-          <p:nvPr/>
-        </p:nvPicPr>
-        <p:blipFill>
-          <a:blip r:embed="rId4"/>
-          <a:stretch>
-            <a:fillRect/>
-          </a:stretch>
-        </p:blipFill>
-        <p:spPr>
-          <a:xfrm>
-            <a:off x="4347333" y="5860108"/>
-            <a:ext cx="4802953" cy="794527"/>
+            <a:off x="3103311" y="2942113"/>
+            <a:ext cx="5802150" cy="3095659"/>
           </a:xfrm>
           <a:prstGeom prst="rect">
             <a:avLst/>
@@ -5040,10 +5616,10 @@
       </p:pic>
       <p:cxnSp>
         <p:nvCxnSpPr>
-          <p:cNvPr id="30" name="מחבר ישר 29">
+          <p:cNvPr id="9" name="מחבר ישר 8">
             <a:extLst>
               <a:ext uri="{FF2B5EF4-FFF2-40B4-BE49-F238E27FC236}">
-                <a16:creationId xmlns:a16="http://schemas.microsoft.com/office/drawing/2014/main" id="{39A0745B-B914-A2FB-F699-352BAD50ECBB}"/>
+                <a16:creationId xmlns:a16="http://schemas.microsoft.com/office/drawing/2014/main" id="{83653774-92CC-5FE9-15E0-914DC377DA19}"/>
               </a:ext>
             </a:extLst>
           </p:cNvPr>
@@ -5054,8 +5630,8 @@
         </p:nvCxnSpPr>
         <p:spPr>
           <a:xfrm>
-            <a:off x="2431622" y="2052589"/>
-            <a:ext cx="2563643" cy="0"/>
+            <a:off x="3713164" y="3451700"/>
+            <a:ext cx="2464898" cy="0"/>
           </a:xfrm>
           <a:prstGeom prst="line">
             <a:avLst/>
@@ -5085,10 +5661,10 @@
       </p:cxnSp>
       <p:cxnSp>
         <p:nvCxnSpPr>
-          <p:cNvPr id="31" name="מחבר ישר 30">
+          <p:cNvPr id="10" name="מחבר ישר 9">
             <a:extLst>
               <a:ext uri="{FF2B5EF4-FFF2-40B4-BE49-F238E27FC236}">
-                <a16:creationId xmlns:a16="http://schemas.microsoft.com/office/drawing/2014/main" id="{2182BB3C-1EC2-7275-E11A-418D1C07264F}"/>
+                <a16:creationId xmlns:a16="http://schemas.microsoft.com/office/drawing/2014/main" id="{AE05D007-4E69-85F2-069C-5E6F2C39E036}"/>
               </a:ext>
             </a:extLst>
           </p:cNvPr>
@@ -5097,8 +5673,808 @@
         </p:nvCxnSpPr>
         <p:spPr>
           <a:xfrm flipV="1">
-            <a:off x="2431622" y="2055009"/>
+            <a:off x="3713164" y="3312269"/>
             <a:ext cx="0" cy="139431"/>
+          </a:xfrm>
+          <a:prstGeom prst="line">
+            <a:avLst/>
+          </a:prstGeom>
+          <a:ln>
+            <a:solidFill>
+              <a:srgbClr val="FF0000"/>
+            </a:solidFill>
+            <a:headEnd type="none" w="med" len="med"/>
+            <a:tailEnd type="none" w="med" len="med"/>
+          </a:ln>
+        </p:spPr>
+        <p:style>
+          <a:lnRef idx="1">
+            <a:schemeClr val="accent6"/>
+          </a:lnRef>
+          <a:fillRef idx="0">
+            <a:schemeClr val="accent6"/>
+          </a:fillRef>
+          <a:effectRef idx="0">
+            <a:schemeClr val="accent6"/>
+          </a:effectRef>
+          <a:fontRef idx="minor">
+            <a:schemeClr val="tx1"/>
+          </a:fontRef>
+        </p:style>
+      </p:cxnSp>
+      <p:sp>
+        <p:nvSpPr>
+          <p:cNvPr id="11" name="תיבת טקסט 10">
+            <a:extLst>
+              <a:ext uri="{FF2B5EF4-FFF2-40B4-BE49-F238E27FC236}">
+                <a16:creationId xmlns:a16="http://schemas.microsoft.com/office/drawing/2014/main" id="{A745DF1F-4D43-4DE9-E2E4-2E743D2EE1A1}"/>
+              </a:ext>
+            </a:extLst>
+          </p:cNvPr>
+          <p:cNvSpPr txBox="1"/>
+          <p:nvPr/>
+        </p:nvSpPr>
+        <p:spPr>
+          <a:xfrm>
+            <a:off x="6246714" y="3298195"/>
+            <a:ext cx="1225848" cy="261610"/>
+          </a:xfrm>
+          <a:prstGeom prst="rect">
+            <a:avLst/>
+          </a:prstGeom>
+          <a:solidFill>
+            <a:srgbClr val="1E1E1E"/>
+          </a:solidFill>
+          <a:ln>
+            <a:solidFill>
+              <a:srgbClr val="FF0000"/>
+            </a:solidFill>
+          </a:ln>
+        </p:spPr>
+        <p:txBody>
+          <a:bodyPr wrap="square" rtlCol="1">
+            <a:spAutoFit/>
+          </a:bodyPr>
+          <a:lstStyle/>
+          <a:p>
+            <a:pPr algn="ctr" rtl="1"/>
+            <a:r>
+              <a:rPr lang="he-IL" sz="1100" b="1" dirty="0">
+                <a:solidFill>
+                  <a:srgbClr val="FFFFFF"/>
+                </a:solidFill>
+              </a:rPr>
+              <a:t>מוסבר בשקף הבא</a:t>
+            </a:r>
+            <a:endParaRPr lang="en" sz="1100" b="1" dirty="0">
+              <a:solidFill>
+                <a:srgbClr val="FFFFFF"/>
+              </a:solidFill>
+            </a:endParaRPr>
+          </a:p>
+        </p:txBody>
+      </p:sp>
+    </p:spTree>
+    <p:extLst>
+      <p:ext uri="{BB962C8B-B14F-4D97-AF65-F5344CB8AC3E}">
+        <p14:creationId xmlns:p14="http://schemas.microsoft.com/office/powerpoint/2010/main" val="1717710796"/>
+      </p:ext>
+    </p:extLst>
+  </p:cSld>
+  <p:clrMapOvr>
+    <a:masterClrMapping/>
+  </p:clrMapOvr>
+</p:sld>
+</file>
+
+<file path=ppt/slides/slide14.xml><?xml version="1.0" encoding="utf-8"?>
+<p:sld xmlns:a="http://schemas.openxmlformats.org/drawingml/2006/main" xmlns:r="http://schemas.openxmlformats.org/officeDocument/2006/relationships" xmlns:p="http://schemas.openxmlformats.org/presentationml/2006/main">
+  <p:cSld>
+    <p:bg>
+      <p:bgPr>
+        <a:solidFill>
+          <a:srgbClr val="1E1E1E"/>
+        </a:solidFill>
+        <a:effectLst/>
+      </p:bgPr>
+    </p:bg>
+    <p:spTree>
+      <p:nvGrpSpPr>
+        <p:cNvPr id="1" name="">
+          <a:extLst>
+            <a:ext uri="{FF2B5EF4-FFF2-40B4-BE49-F238E27FC236}">
+              <a16:creationId xmlns:a16="http://schemas.microsoft.com/office/drawing/2014/main" id="{1A6EB112-5EB3-1074-1A32-6EF6913EAD31}"/>
+            </a:ext>
+          </a:extLst>
+        </p:cNvPr>
+        <p:cNvGrpSpPr/>
+        <p:nvPr/>
+      </p:nvGrpSpPr>
+      <p:grpSpPr>
+        <a:xfrm>
+          <a:off x="0" y="0"/>
+          <a:ext cx="0" cy="0"/>
+          <a:chOff x="0" y="0"/>
+          <a:chExt cx="0" cy="0"/>
+        </a:xfrm>
+      </p:grpSpPr>
+      <p:sp>
+        <p:nvSpPr>
+          <p:cNvPr id="2" name="Title 1">
+            <a:extLst>
+              <a:ext uri="{FF2B5EF4-FFF2-40B4-BE49-F238E27FC236}">
+                <a16:creationId xmlns:a16="http://schemas.microsoft.com/office/drawing/2014/main" id="{24DD0427-EDFB-C54F-E2E2-C6AF273D0BD1}"/>
+              </a:ext>
+            </a:extLst>
+          </p:cNvPr>
+          <p:cNvSpPr>
+            <a:spLocks noGrp="1"/>
+          </p:cNvSpPr>
+          <p:nvPr>
+            <p:ph type="title"/>
+          </p:nvPr>
+        </p:nvSpPr>
+        <p:spPr/>
+        <p:txBody>
+          <a:bodyPr>
+            <a:normAutofit/>
+          </a:bodyPr>
+          <a:lstStyle/>
+          <a:p>
+            <a:r>
+              <a:rPr lang="he-IL" sz="3600" b="1" dirty="0">
+                <a:solidFill>
+                  <a:srgbClr val="FFFFFF"/>
+                </a:solidFill>
+              </a:rPr>
+              <a:t>כרייה – יצירת מטבעות עמלות ושירפה</a:t>
+            </a:r>
+            <a:endParaRPr sz="3600" b="1" dirty="0">
+              <a:solidFill>
+                <a:srgbClr val="FFFFFF"/>
+              </a:solidFill>
+            </a:endParaRPr>
+          </a:p>
+        </p:txBody>
+      </p:sp>
+      <p:sp>
+        <p:nvSpPr>
+          <p:cNvPr id="15" name="תיבת טקסט 14">
+            <a:extLst>
+              <a:ext uri="{FF2B5EF4-FFF2-40B4-BE49-F238E27FC236}">
+                <a16:creationId xmlns:a16="http://schemas.microsoft.com/office/drawing/2014/main" id="{6C266058-AE13-3BB9-4F98-5CA6607243B7}"/>
+              </a:ext>
+            </a:extLst>
+          </p:cNvPr>
+          <p:cNvSpPr txBox="1"/>
+          <p:nvPr/>
+        </p:nvSpPr>
+        <p:spPr>
+          <a:xfrm>
+            <a:off x="69193" y="1156373"/>
+            <a:ext cx="3469454" cy="307777"/>
+          </a:xfrm>
+          <a:prstGeom prst="rect">
+            <a:avLst/>
+          </a:prstGeom>
+          <a:noFill/>
+        </p:spPr>
+        <p:txBody>
+          <a:bodyPr wrap="square" rtlCol="1">
+            <a:spAutoFit/>
+          </a:bodyPr>
+          <a:lstStyle/>
+          <a:p>
+            <a:pPr marL="0" defTabSz="457200" rtl="0" eaLnBrk="1" latinLnBrk="0" hangingPunct="1"/>
+            <a:r>
+              <a:rPr lang="en-US" sz="1400" b="1" dirty="0">
+                <a:solidFill>
+                  <a:srgbClr val="FFFFFF"/>
+                </a:solidFill>
+              </a:rPr>
+              <a:t>Miner – mine block</a:t>
+            </a:r>
+            <a:endParaRPr lang="he-IL" sz="1400" b="1" dirty="0">
+              <a:solidFill>
+                <a:srgbClr val="FFFFFF"/>
+              </a:solidFill>
+            </a:endParaRPr>
+          </a:p>
+        </p:txBody>
+      </p:sp>
+      <p:pic>
+        <p:nvPicPr>
+          <p:cNvPr id="7" name="תמונה 6">
+            <a:extLst>
+              <a:ext uri="{FF2B5EF4-FFF2-40B4-BE49-F238E27FC236}">
+                <a16:creationId xmlns:a16="http://schemas.microsoft.com/office/drawing/2014/main" id="{346C1E1F-C06B-DF68-344E-DC85558FB4B7}"/>
+              </a:ext>
+            </a:extLst>
+          </p:cNvPr>
+          <p:cNvPicPr>
+            <a:picLocks noChangeAspect="1"/>
+          </p:cNvPicPr>
+          <p:nvPr/>
+        </p:nvPicPr>
+        <p:blipFill>
+          <a:blip r:embed="rId2"/>
+          <a:stretch>
+            <a:fillRect/>
+          </a:stretch>
+        </p:blipFill>
+        <p:spPr>
+          <a:xfrm>
+            <a:off x="130978" y="1477372"/>
+            <a:ext cx="6072809" cy="3903256"/>
+          </a:xfrm>
+          <a:prstGeom prst="rect">
+            <a:avLst/>
+          </a:prstGeom>
+          <a:ln>
+            <a:solidFill>
+              <a:schemeClr val="accent1"/>
+            </a:solidFill>
+          </a:ln>
+        </p:spPr>
+      </p:pic>
+      <p:sp>
+        <p:nvSpPr>
+          <p:cNvPr id="3" name="תיבת טקסט 2">
+            <a:extLst>
+              <a:ext uri="{FF2B5EF4-FFF2-40B4-BE49-F238E27FC236}">
+                <a16:creationId xmlns:a16="http://schemas.microsoft.com/office/drawing/2014/main" id="{D1B400D2-7BCA-0443-68FB-FFA9A077AF41}"/>
+              </a:ext>
+            </a:extLst>
+          </p:cNvPr>
+          <p:cNvSpPr txBox="1"/>
+          <p:nvPr/>
+        </p:nvSpPr>
+        <p:spPr>
+          <a:xfrm>
+            <a:off x="5734544" y="2767011"/>
+            <a:ext cx="3278478" cy="938719"/>
+          </a:xfrm>
+          <a:prstGeom prst="rect">
+            <a:avLst/>
+          </a:prstGeom>
+          <a:noFill/>
+          <a:ln>
+            <a:noFill/>
+          </a:ln>
+        </p:spPr>
+        <p:txBody>
+          <a:bodyPr wrap="square" rtlCol="1">
+            <a:spAutoFit/>
+          </a:bodyPr>
+          <a:lstStyle/>
+          <a:p>
+            <a:pPr algn="ctr" rtl="1"/>
+            <a:r>
+              <a:rPr lang="he-IL" sz="1100" b="1" dirty="0" err="1">
+                <a:highlight>
+                  <a:srgbClr val="FFFF00"/>
+                </a:highlight>
+              </a:rPr>
+              <a:t>בטרנזקציה</a:t>
+            </a:r>
+            <a:r>
+              <a:rPr lang="he-IL" sz="1100" b="1" dirty="0">
+                <a:highlight>
+                  <a:srgbClr val="FFFF00"/>
+                </a:highlight>
+              </a:rPr>
+              <a:t> מוגדר הסכום העמלה והטיפ, כך כאשר </a:t>
+            </a:r>
+            <a:r>
+              <a:rPr lang="he-IL" sz="1100" b="1" dirty="0" err="1">
+                <a:highlight>
+                  <a:srgbClr val="FFFF00"/>
+                </a:highlight>
+              </a:rPr>
+              <a:t>הטרנזקציה</a:t>
+            </a:r>
+            <a:r>
+              <a:rPr lang="he-IL" sz="1100" b="1" dirty="0">
+                <a:highlight>
+                  <a:srgbClr val="FFFF00"/>
+                </a:highlight>
+              </a:rPr>
+              <a:t> נרשמת מחושב הסכום שכולל את </a:t>
+            </a:r>
+            <a:r>
+              <a:rPr lang="he-IL" sz="1100" b="1" dirty="0" err="1">
+                <a:highlight>
+                  <a:srgbClr val="FFFF00"/>
+                </a:highlight>
+              </a:rPr>
+              <a:t>הכל</a:t>
+            </a:r>
+            <a:r>
+              <a:rPr lang="he-IL" sz="1100" b="1" dirty="0">
+                <a:highlight>
+                  <a:srgbClr val="FFFF00"/>
+                </a:highlight>
+              </a:rPr>
+              <a:t> והוא זה שנלקח מהשולח, המקבל מקבל את הסכום הבסיסי והכורה מקבל את כל הטיפים.</a:t>
+            </a:r>
+            <a:br>
+              <a:rPr lang="en-US" sz="1100" b="1" dirty="0">
+                <a:highlight>
+                  <a:srgbClr val="FFFF00"/>
+                </a:highlight>
+              </a:rPr>
+            </a:br>
+            <a:r>
+              <a:rPr lang="he-IL" sz="1100" b="1" dirty="0">
+                <a:highlight>
+                  <a:srgbClr val="FFFF00"/>
+                </a:highlight>
+              </a:rPr>
+              <a:t>כך יוצא שהעמלה נשרפת.</a:t>
+            </a:r>
+            <a:endParaRPr lang="en" sz="1100" b="1" dirty="0">
+              <a:highlight>
+                <a:srgbClr val="FFFF00"/>
+              </a:highlight>
+            </a:endParaRPr>
+          </a:p>
+        </p:txBody>
+      </p:sp>
+      <p:pic>
+        <p:nvPicPr>
+          <p:cNvPr id="5" name="תמונה 4">
+            <a:extLst>
+              <a:ext uri="{FF2B5EF4-FFF2-40B4-BE49-F238E27FC236}">
+                <a16:creationId xmlns:a16="http://schemas.microsoft.com/office/drawing/2014/main" id="{7B861C7D-6FEC-E229-1D87-AFE9DABD7DB8}"/>
+              </a:ext>
+            </a:extLst>
+          </p:cNvPr>
+          <p:cNvPicPr>
+            <a:picLocks noChangeAspect="1"/>
+          </p:cNvPicPr>
+          <p:nvPr/>
+        </p:nvPicPr>
+        <p:blipFill>
+          <a:blip r:embed="rId3"/>
+          <a:stretch>
+            <a:fillRect/>
+          </a:stretch>
+        </p:blipFill>
+        <p:spPr>
+          <a:xfrm>
+            <a:off x="3254847" y="4006225"/>
+            <a:ext cx="5857240" cy="1968108"/>
+          </a:xfrm>
+          <a:prstGeom prst="rect">
+            <a:avLst/>
+          </a:prstGeom>
+          <a:ln>
+            <a:solidFill>
+              <a:schemeClr val="accent1"/>
+            </a:solidFill>
+          </a:ln>
+        </p:spPr>
+      </p:pic>
+      <p:cxnSp>
+        <p:nvCxnSpPr>
+          <p:cNvPr id="8" name="מחבר ישר 7">
+            <a:extLst>
+              <a:ext uri="{FF2B5EF4-FFF2-40B4-BE49-F238E27FC236}">
+                <a16:creationId xmlns:a16="http://schemas.microsoft.com/office/drawing/2014/main" id="{E88A2AAA-16E0-561D-83C3-10349C41AFDE}"/>
+              </a:ext>
+            </a:extLst>
+          </p:cNvPr>
+          <p:cNvCxnSpPr>
+            <a:cxnSpLocks/>
+          </p:cNvCxnSpPr>
+          <p:nvPr/>
+        </p:nvCxnSpPr>
+        <p:spPr>
+          <a:xfrm>
+            <a:off x="772820" y="3625030"/>
+            <a:ext cx="3799180" cy="13222"/>
+          </a:xfrm>
+          <a:prstGeom prst="line">
+            <a:avLst/>
+          </a:prstGeom>
+          <a:ln>
+            <a:solidFill>
+              <a:srgbClr val="FF0000"/>
+            </a:solidFill>
+            <a:headEnd type="none" w="med" len="med"/>
+            <a:tailEnd type="none" w="med" len="med"/>
+          </a:ln>
+        </p:spPr>
+        <p:style>
+          <a:lnRef idx="1">
+            <a:schemeClr val="accent6"/>
+          </a:lnRef>
+          <a:fillRef idx="0">
+            <a:schemeClr val="accent6"/>
+          </a:fillRef>
+          <a:effectRef idx="0">
+            <a:schemeClr val="accent6"/>
+          </a:effectRef>
+          <a:fontRef idx="minor">
+            <a:schemeClr val="tx1"/>
+          </a:fontRef>
+        </p:style>
+      </p:cxnSp>
+      <p:cxnSp>
+        <p:nvCxnSpPr>
+          <p:cNvPr id="9" name="מחבר ישר 8">
+            <a:extLst>
+              <a:ext uri="{FF2B5EF4-FFF2-40B4-BE49-F238E27FC236}">
+                <a16:creationId xmlns:a16="http://schemas.microsoft.com/office/drawing/2014/main" id="{4588BF10-12AA-EA94-49C7-0272FE7F3AD3}"/>
+              </a:ext>
+            </a:extLst>
+          </p:cNvPr>
+          <p:cNvCxnSpPr/>
+          <p:nvPr/>
+        </p:nvCxnSpPr>
+        <p:spPr>
+          <a:xfrm flipV="1">
+            <a:off x="772820" y="3485599"/>
+            <a:ext cx="0" cy="139431"/>
+          </a:xfrm>
+          <a:prstGeom prst="line">
+            <a:avLst/>
+          </a:prstGeom>
+          <a:ln>
+            <a:solidFill>
+              <a:srgbClr val="FF0000"/>
+            </a:solidFill>
+            <a:headEnd type="none" w="med" len="med"/>
+            <a:tailEnd type="none" w="med" len="med"/>
+          </a:ln>
+        </p:spPr>
+        <p:style>
+          <a:lnRef idx="1">
+            <a:schemeClr val="accent6"/>
+          </a:lnRef>
+          <a:fillRef idx="0">
+            <a:schemeClr val="accent6"/>
+          </a:fillRef>
+          <a:effectRef idx="0">
+            <a:schemeClr val="accent6"/>
+          </a:effectRef>
+          <a:fontRef idx="minor">
+            <a:schemeClr val="tx1"/>
+          </a:fontRef>
+        </p:style>
+      </p:cxnSp>
+      <p:cxnSp>
+        <p:nvCxnSpPr>
+          <p:cNvPr id="11" name="מחבר ישר 10">
+            <a:extLst>
+              <a:ext uri="{FF2B5EF4-FFF2-40B4-BE49-F238E27FC236}">
+                <a16:creationId xmlns:a16="http://schemas.microsoft.com/office/drawing/2014/main" id="{2299C882-3C5B-55CD-B5F5-F38943EAAAF2}"/>
+              </a:ext>
+            </a:extLst>
+          </p:cNvPr>
+          <p:cNvCxnSpPr>
+            <a:cxnSpLocks/>
+          </p:cNvCxnSpPr>
+          <p:nvPr/>
+        </p:nvCxnSpPr>
+        <p:spPr>
+          <a:xfrm>
+            <a:off x="4572000" y="3631641"/>
+            <a:ext cx="0" cy="307106"/>
+          </a:xfrm>
+          <a:prstGeom prst="line">
+            <a:avLst/>
+          </a:prstGeom>
+          <a:ln>
+            <a:solidFill>
+              <a:srgbClr val="FF0000"/>
+            </a:solidFill>
+            <a:headEnd type="none" w="med" len="med"/>
+            <a:tailEnd type="arrow" w="med" len="med"/>
+          </a:ln>
+        </p:spPr>
+        <p:style>
+          <a:lnRef idx="1">
+            <a:schemeClr val="accent6"/>
+          </a:lnRef>
+          <a:fillRef idx="0">
+            <a:schemeClr val="accent6"/>
+          </a:fillRef>
+          <a:effectRef idx="0">
+            <a:schemeClr val="accent6"/>
+          </a:effectRef>
+          <a:fontRef idx="minor">
+            <a:schemeClr val="tx1"/>
+          </a:fontRef>
+        </p:style>
+      </p:cxnSp>
+      <p:cxnSp>
+        <p:nvCxnSpPr>
+          <p:cNvPr id="14" name="מחבר ישר 13">
+            <a:extLst>
+              <a:ext uri="{FF2B5EF4-FFF2-40B4-BE49-F238E27FC236}">
+                <a16:creationId xmlns:a16="http://schemas.microsoft.com/office/drawing/2014/main" id="{55A9CEFC-7D85-7878-2794-268734CDF24B}"/>
+              </a:ext>
+            </a:extLst>
+          </p:cNvPr>
+          <p:cNvCxnSpPr>
+            <a:cxnSpLocks/>
+          </p:cNvCxnSpPr>
+          <p:nvPr/>
+        </p:nvCxnSpPr>
+        <p:spPr>
+          <a:xfrm>
+            <a:off x="2054773" y="3250446"/>
+            <a:ext cx="3654042" cy="13222"/>
+          </a:xfrm>
+          <a:prstGeom prst="line">
+            <a:avLst/>
+          </a:prstGeom>
+          <a:ln>
+            <a:solidFill>
+              <a:srgbClr val="FF0000"/>
+            </a:solidFill>
+            <a:headEnd type="none" w="med" len="med"/>
+            <a:tailEnd type="arrow" w="med" len="med"/>
+          </a:ln>
+        </p:spPr>
+        <p:style>
+          <a:lnRef idx="1">
+            <a:schemeClr val="accent6"/>
+          </a:lnRef>
+          <a:fillRef idx="0">
+            <a:schemeClr val="accent6"/>
+          </a:fillRef>
+          <a:effectRef idx="0">
+            <a:schemeClr val="accent6"/>
+          </a:effectRef>
+          <a:fontRef idx="minor">
+            <a:schemeClr val="tx1"/>
+          </a:fontRef>
+        </p:style>
+      </p:cxnSp>
+      <p:cxnSp>
+        <p:nvCxnSpPr>
+          <p:cNvPr id="16" name="מחבר ישר 15">
+            <a:extLst>
+              <a:ext uri="{FF2B5EF4-FFF2-40B4-BE49-F238E27FC236}">
+                <a16:creationId xmlns:a16="http://schemas.microsoft.com/office/drawing/2014/main" id="{52FFF8A3-A22D-65D2-D76B-5B860DF5DDAB}"/>
+              </a:ext>
+            </a:extLst>
+          </p:cNvPr>
+          <p:cNvCxnSpPr/>
+          <p:nvPr/>
+        </p:nvCxnSpPr>
+        <p:spPr>
+          <a:xfrm flipV="1">
+            <a:off x="2054773" y="3111015"/>
+            <a:ext cx="0" cy="139431"/>
+          </a:xfrm>
+          <a:prstGeom prst="line">
+            <a:avLst/>
+          </a:prstGeom>
+          <a:ln>
+            <a:solidFill>
+              <a:srgbClr val="FF0000"/>
+            </a:solidFill>
+            <a:headEnd type="none" w="med" len="med"/>
+            <a:tailEnd type="none" w="med" len="med"/>
+          </a:ln>
+        </p:spPr>
+        <p:style>
+          <a:lnRef idx="1">
+            <a:schemeClr val="accent6"/>
+          </a:lnRef>
+          <a:fillRef idx="0">
+            <a:schemeClr val="accent6"/>
+          </a:fillRef>
+          <a:effectRef idx="0">
+            <a:schemeClr val="accent6"/>
+          </a:effectRef>
+          <a:fontRef idx="minor">
+            <a:schemeClr val="tx1"/>
+          </a:fontRef>
+        </p:style>
+      </p:cxnSp>
+      <p:cxnSp>
+        <p:nvCxnSpPr>
+          <p:cNvPr id="18" name="מחבר ישר 17">
+            <a:extLst>
+              <a:ext uri="{FF2B5EF4-FFF2-40B4-BE49-F238E27FC236}">
+                <a16:creationId xmlns:a16="http://schemas.microsoft.com/office/drawing/2014/main" id="{AF5B85CF-9B12-4B0C-A8EB-F957D3AA2533}"/>
+              </a:ext>
+            </a:extLst>
+          </p:cNvPr>
+          <p:cNvCxnSpPr>
+            <a:cxnSpLocks/>
+            <a:endCxn id="3" idx="2"/>
+          </p:cNvCxnSpPr>
+          <p:nvPr/>
+        </p:nvCxnSpPr>
+        <p:spPr>
+          <a:xfrm flipV="1">
+            <a:off x="7373783" y="3705730"/>
+            <a:ext cx="0" cy="156779"/>
+          </a:xfrm>
+          <a:prstGeom prst="line">
+            <a:avLst/>
+          </a:prstGeom>
+          <a:ln>
+            <a:solidFill>
+              <a:srgbClr val="FF0000"/>
+            </a:solidFill>
+            <a:headEnd type="none" w="med" len="med"/>
+            <a:tailEnd type="arrow" w="med" len="med"/>
+          </a:ln>
+        </p:spPr>
+        <p:style>
+          <a:lnRef idx="1">
+            <a:schemeClr val="accent6"/>
+          </a:lnRef>
+          <a:fillRef idx="0">
+            <a:schemeClr val="accent6"/>
+          </a:fillRef>
+          <a:effectRef idx="0">
+            <a:schemeClr val="accent6"/>
+          </a:effectRef>
+          <a:fontRef idx="minor">
+            <a:schemeClr val="tx1"/>
+          </a:fontRef>
+        </p:style>
+      </p:cxnSp>
+      <p:cxnSp>
+        <p:nvCxnSpPr>
+          <p:cNvPr id="19" name="מחבר ישר 18">
+            <a:extLst>
+              <a:ext uri="{FF2B5EF4-FFF2-40B4-BE49-F238E27FC236}">
+                <a16:creationId xmlns:a16="http://schemas.microsoft.com/office/drawing/2014/main" id="{91ECD984-176E-E319-40F0-CEB6807E599A}"/>
+              </a:ext>
+            </a:extLst>
+          </p:cNvPr>
+          <p:cNvCxnSpPr>
+            <a:cxnSpLocks/>
+          </p:cNvCxnSpPr>
+          <p:nvPr/>
+        </p:nvCxnSpPr>
+        <p:spPr>
+          <a:xfrm flipV="1">
+            <a:off x="7968750" y="5241197"/>
+            <a:ext cx="0" cy="563255"/>
+          </a:xfrm>
+          <a:prstGeom prst="line">
+            <a:avLst/>
+          </a:prstGeom>
+          <a:ln>
+            <a:solidFill>
+              <a:srgbClr val="FF0000"/>
+            </a:solidFill>
+            <a:headEnd type="none" w="med" len="med"/>
+            <a:tailEnd type="none" w="med" len="med"/>
+          </a:ln>
+        </p:spPr>
+        <p:style>
+          <a:lnRef idx="1">
+            <a:schemeClr val="accent6"/>
+          </a:lnRef>
+          <a:fillRef idx="0">
+            <a:schemeClr val="accent6"/>
+          </a:fillRef>
+          <a:effectRef idx="0">
+            <a:schemeClr val="accent6"/>
+          </a:effectRef>
+          <a:fontRef idx="minor">
+            <a:schemeClr val="tx1"/>
+          </a:fontRef>
+        </p:style>
+      </p:cxnSp>
+      <p:cxnSp>
+        <p:nvCxnSpPr>
+          <p:cNvPr id="24" name="מחבר ישר 23">
+            <a:extLst>
+              <a:ext uri="{FF2B5EF4-FFF2-40B4-BE49-F238E27FC236}">
+                <a16:creationId xmlns:a16="http://schemas.microsoft.com/office/drawing/2014/main" id="{07F7D2F0-DAFD-C1EC-F448-B3296D7B294D}"/>
+              </a:ext>
+            </a:extLst>
+          </p:cNvPr>
+          <p:cNvCxnSpPr>
+            <a:cxnSpLocks/>
+          </p:cNvCxnSpPr>
+          <p:nvPr/>
+        </p:nvCxnSpPr>
+        <p:spPr>
+          <a:xfrm>
+            <a:off x="7373783" y="3862509"/>
+            <a:ext cx="1564808" cy="0"/>
+          </a:xfrm>
+          <a:prstGeom prst="line">
+            <a:avLst/>
+          </a:prstGeom>
+          <a:ln>
+            <a:solidFill>
+              <a:srgbClr val="FF0000"/>
+            </a:solidFill>
+            <a:headEnd type="none" w="med" len="med"/>
+            <a:tailEnd type="none" w="med" len="med"/>
+          </a:ln>
+        </p:spPr>
+        <p:style>
+          <a:lnRef idx="1">
+            <a:schemeClr val="accent6"/>
+          </a:lnRef>
+          <a:fillRef idx="0">
+            <a:schemeClr val="accent6"/>
+          </a:fillRef>
+          <a:effectRef idx="0">
+            <a:schemeClr val="accent6"/>
+          </a:effectRef>
+          <a:fontRef idx="minor">
+            <a:schemeClr val="tx1"/>
+          </a:fontRef>
+        </p:style>
+      </p:cxnSp>
+      <p:cxnSp>
+        <p:nvCxnSpPr>
+          <p:cNvPr id="27" name="מחבר ישר 26">
+            <a:extLst>
+              <a:ext uri="{FF2B5EF4-FFF2-40B4-BE49-F238E27FC236}">
+                <a16:creationId xmlns:a16="http://schemas.microsoft.com/office/drawing/2014/main" id="{9D19EAB8-8549-F0BE-1F8F-B3C8D3D53A56}"/>
+              </a:ext>
+            </a:extLst>
+          </p:cNvPr>
+          <p:cNvCxnSpPr>
+            <a:cxnSpLocks/>
+          </p:cNvCxnSpPr>
+          <p:nvPr/>
+        </p:nvCxnSpPr>
+        <p:spPr>
+          <a:xfrm>
+            <a:off x="8938591" y="3862509"/>
+            <a:ext cx="0" cy="1660315"/>
+          </a:xfrm>
+          <a:prstGeom prst="line">
+            <a:avLst/>
+          </a:prstGeom>
+          <a:ln>
+            <a:solidFill>
+              <a:srgbClr val="FF0000"/>
+            </a:solidFill>
+            <a:headEnd type="none" w="med" len="med"/>
+            <a:tailEnd type="none" w="med" len="med"/>
+          </a:ln>
+        </p:spPr>
+        <p:style>
+          <a:lnRef idx="1">
+            <a:schemeClr val="accent6"/>
+          </a:lnRef>
+          <a:fillRef idx="0">
+            <a:schemeClr val="accent6"/>
+          </a:fillRef>
+          <a:effectRef idx="0">
+            <a:schemeClr val="accent6"/>
+          </a:effectRef>
+          <a:fontRef idx="minor">
+            <a:schemeClr val="tx1"/>
+          </a:fontRef>
+        </p:style>
+      </p:cxnSp>
+      <p:cxnSp>
+        <p:nvCxnSpPr>
+          <p:cNvPr id="30" name="מחבר ישר 29">
+            <a:extLst>
+              <a:ext uri="{FF2B5EF4-FFF2-40B4-BE49-F238E27FC236}">
+                <a16:creationId xmlns:a16="http://schemas.microsoft.com/office/drawing/2014/main" id="{75F8D536-9A9D-3CF3-6BB9-8D8A5390AEE3}"/>
+              </a:ext>
+            </a:extLst>
+          </p:cNvPr>
+          <p:cNvCxnSpPr>
+            <a:cxnSpLocks/>
+          </p:cNvCxnSpPr>
+          <p:nvPr/>
+        </p:nvCxnSpPr>
+        <p:spPr>
+          <a:xfrm>
+            <a:off x="7968750" y="5522824"/>
+            <a:ext cx="969841" cy="0"/>
           </a:xfrm>
           <a:prstGeom prst="line">
             <a:avLst/>
@@ -5131,7 +6507,7 @@
           <p:cNvPr id="32" name="תיבת טקסט 31">
             <a:extLst>
               <a:ext uri="{FF2B5EF4-FFF2-40B4-BE49-F238E27FC236}">
-                <a16:creationId xmlns:a16="http://schemas.microsoft.com/office/drawing/2014/main" id="{DFFB047C-8748-9C39-B879-4695C2252697}"/>
+                <a16:creationId xmlns:a16="http://schemas.microsoft.com/office/drawing/2014/main" id="{99627481-3843-3AF7-5C73-CDEB9B02E8E9}"/>
               </a:ext>
             </a:extLst>
           </p:cNvPr>
@@ -5140,269 +6516,57 @@
         </p:nvSpPr>
         <p:spPr>
           <a:xfrm>
-            <a:off x="5046539" y="1411289"/>
-            <a:ext cx="4009491" cy="769441"/>
-          </a:xfrm>
-          <a:prstGeom prst="rect">
-            <a:avLst/>
-          </a:prstGeom>
-          <a:solidFill>
-            <a:srgbClr val="1E1E1E"/>
-          </a:solidFill>
-          <a:ln>
-            <a:solidFill>
-              <a:srgbClr val="FF0000"/>
-            </a:solidFill>
-          </a:ln>
-        </p:spPr>
-        <p:txBody>
-          <a:bodyPr wrap="square" rtlCol="1">
-            <a:spAutoFit/>
-          </a:bodyPr>
-          <a:lstStyle/>
-          <a:p>
-            <a:pPr algn="ctr" rtl="1"/>
-            <a:r>
-              <a:rPr lang="he-IL" sz="1100" b="1" dirty="0">
-                <a:solidFill>
-                  <a:srgbClr val="FFFFFF"/>
-                </a:solidFill>
-              </a:rPr>
-              <a:t>כרייה של מקסימום 50 בלוקים לפי שהוגדר </a:t>
-            </a:r>
-            <a:r>
-              <a:rPr lang="he-IL" sz="1100" b="1" dirty="0" err="1">
-                <a:solidFill>
-                  <a:srgbClr val="FFFFFF"/>
-                </a:solidFill>
-              </a:rPr>
-              <a:t>בקונפיג</a:t>
-            </a:r>
-            <a:r>
-              <a:rPr lang="he-IL" sz="1100" b="1" dirty="0">
-                <a:solidFill>
-                  <a:srgbClr val="FFFFFF"/>
-                </a:solidFill>
-              </a:rPr>
-              <a:t> ב</a:t>
-            </a:r>
-            <a:r>
-              <a:rPr lang="en-US" sz="1100" b="1" dirty="0">
-                <a:solidFill>
-                  <a:srgbClr val="FFFFFF"/>
-                </a:solidFill>
-              </a:rPr>
-              <a:t>main</a:t>
-            </a:r>
-            <a:r>
-              <a:rPr lang="he-IL" sz="1100" b="1" dirty="0">
-                <a:solidFill>
-                  <a:srgbClr val="FFFFFF"/>
-                </a:solidFill>
-              </a:rPr>
-              <a:t> בשדה </a:t>
-            </a:r>
-            <a:r>
-              <a:rPr lang="en" sz="1100" b="1" dirty="0" err="1">
-                <a:solidFill>
-                  <a:srgbClr val="FFFFFF"/>
-                </a:solidFill>
-              </a:rPr>
-              <a:t>transactionsPerBlockNoCoinbase</a:t>
-            </a:r>
-            <a:r>
-              <a:rPr lang="he-IL" sz="1100" b="1" dirty="0">
-                <a:solidFill>
-                  <a:srgbClr val="FFFFFF"/>
-                </a:solidFill>
-              </a:rPr>
-              <a:t>, מדלג על </a:t>
-            </a:r>
-            <a:r>
-              <a:rPr lang="he-IL" sz="1100" b="1" dirty="0" err="1">
-                <a:solidFill>
-                  <a:srgbClr val="FFFFFF"/>
-                </a:solidFill>
-              </a:rPr>
-              <a:t>טרנזקציות</a:t>
-            </a:r>
-            <a:r>
-              <a:rPr lang="he-IL" sz="1100" b="1" dirty="0">
-                <a:solidFill>
-                  <a:srgbClr val="FFFFFF"/>
-                </a:solidFill>
-              </a:rPr>
-              <a:t> לא תקינות ואם אין עוד מספיק </a:t>
-            </a:r>
-            <a:r>
-              <a:rPr lang="he-IL" sz="1100" b="1" dirty="0" err="1">
-                <a:solidFill>
-                  <a:srgbClr val="FFFFFF"/>
-                </a:solidFill>
-              </a:rPr>
-              <a:t>טרנזקציות</a:t>
-            </a:r>
-            <a:r>
-              <a:rPr lang="he-IL" sz="1100" b="1" dirty="0">
-                <a:solidFill>
-                  <a:srgbClr val="FFFFFF"/>
-                </a:solidFill>
-              </a:rPr>
-              <a:t> במאגר יצא בלוק קצר יותר באמצעות </a:t>
-            </a:r>
-            <a:r>
-              <a:rPr lang="en" sz="1100" b="1" dirty="0" err="1">
-                <a:solidFill>
-                  <a:srgbClr val="FFFFFF"/>
-                </a:solidFill>
-              </a:rPr>
-              <a:t>TransactionProcessor</a:t>
-            </a:r>
-            <a:endParaRPr lang="en" sz="1100" b="1" dirty="0">
-              <a:solidFill>
-                <a:srgbClr val="FFFFFF"/>
-              </a:solidFill>
-            </a:endParaRPr>
-          </a:p>
-        </p:txBody>
-      </p:sp>
-      <p:sp>
-        <p:nvSpPr>
-          <p:cNvPr id="33" name="תיבת טקסט 32">
-            <a:extLst>
-              <a:ext uri="{FF2B5EF4-FFF2-40B4-BE49-F238E27FC236}">
-                <a16:creationId xmlns:a16="http://schemas.microsoft.com/office/drawing/2014/main" id="{FD1A9206-0296-B416-42C0-3810CB7E58EF}"/>
-              </a:ext>
-            </a:extLst>
-          </p:cNvPr>
-          <p:cNvSpPr txBox="1"/>
-          <p:nvPr/>
-        </p:nvSpPr>
-        <p:spPr>
-          <a:xfrm>
-            <a:off x="5597969" y="4332423"/>
-            <a:ext cx="3278478" cy="938719"/>
+            <a:off x="6426467" y="4539618"/>
+            <a:ext cx="1526380" cy="261610"/>
           </a:xfrm>
           <a:prstGeom prst="rect">
             <a:avLst/>
           </a:prstGeom>
           <a:noFill/>
-          <a:ln>
-            <a:noFill/>
-          </a:ln>
         </p:spPr>
         <p:txBody>
-          <a:bodyPr wrap="square" rtlCol="1">
+          <a:bodyPr wrap="none" rtlCol="1">
             <a:spAutoFit/>
           </a:bodyPr>
           <a:lstStyle/>
           <a:p>
-            <a:pPr algn="ctr" rtl="1"/>
-            <a:r>
-              <a:rPr lang="he-IL" sz="1100" b="1" dirty="0" err="1">
-                <a:highlight>
-                  <a:srgbClr val="FFFF00"/>
-                </a:highlight>
-              </a:rPr>
-              <a:t>בטרנזקציה</a:t>
-            </a:r>
-            <a:r>
-              <a:rPr lang="he-IL" sz="1100" b="1" dirty="0">
-                <a:highlight>
-                  <a:srgbClr val="FFFF00"/>
-                </a:highlight>
-              </a:rPr>
-              <a:t> מוגדר הסכום העמלה והטיפ, כך כאשר </a:t>
-            </a:r>
-            <a:r>
-              <a:rPr lang="he-IL" sz="1100" b="1" dirty="0" err="1">
-                <a:highlight>
-                  <a:srgbClr val="FFFF00"/>
-                </a:highlight>
-              </a:rPr>
-              <a:t>הטרנזקציה</a:t>
-            </a:r>
-            <a:r>
-              <a:rPr lang="he-IL" sz="1100" b="1" dirty="0">
-                <a:highlight>
-                  <a:srgbClr val="FFFF00"/>
-                </a:highlight>
-              </a:rPr>
-              <a:t> נרשמת מחושב הסכום שכולל את </a:t>
-            </a:r>
-            <a:r>
-              <a:rPr lang="he-IL" sz="1100" b="1" dirty="0" err="1">
-                <a:highlight>
-                  <a:srgbClr val="FFFF00"/>
-                </a:highlight>
-              </a:rPr>
-              <a:t>הכל</a:t>
-            </a:r>
-            <a:r>
-              <a:rPr lang="he-IL" sz="1100" b="1" dirty="0">
-                <a:highlight>
-                  <a:srgbClr val="FFFF00"/>
-                </a:highlight>
-              </a:rPr>
-              <a:t> והוא זה שנלקח מהשולח, המקבל מקבל את הסכום הבסיסי והכורה מקבל את כל הטיפים.</a:t>
-            </a:r>
-            <a:br>
-              <a:rPr lang="en-US" sz="1100" b="1" dirty="0">
-                <a:highlight>
-                  <a:srgbClr val="FFFF00"/>
-                </a:highlight>
-              </a:rPr>
-            </a:br>
-            <a:r>
-              <a:rPr lang="he-IL" sz="1100" b="1" dirty="0">
-                <a:highlight>
-                  <a:srgbClr val="FFFF00"/>
-                </a:highlight>
-              </a:rPr>
-              <a:t>כך יוצא שהעמלה נשרפת.</a:t>
-            </a:r>
-            <a:endParaRPr lang="en" sz="1100" b="1" dirty="0">
-              <a:highlight>
-                <a:srgbClr val="FFFF00"/>
-              </a:highlight>
+            <a:pPr marL="0" algn="l" defTabSz="457200" rtl="0" eaLnBrk="1" latinLnBrk="0" hangingPunct="1"/>
+            <a:r>
+              <a:rPr lang="en-US" sz="1100" dirty="0">
+                <a:solidFill>
+                  <a:srgbClr val="C00000"/>
+                </a:solidFill>
+              </a:rPr>
+              <a:t>// </a:t>
+            </a:r>
+            <a:r>
+              <a:rPr lang="en-US" sz="1100" dirty="0" err="1">
+                <a:solidFill>
+                  <a:srgbClr val="C00000"/>
+                </a:solidFill>
+              </a:rPr>
+              <a:t>CoinBase</a:t>
+            </a:r>
+            <a:r>
+              <a:rPr lang="en-US" sz="1100" dirty="0">
+                <a:solidFill>
+                  <a:srgbClr val="C00000"/>
+                </a:solidFill>
+              </a:rPr>
+              <a:t> transaction</a:t>
+            </a:r>
+            <a:endParaRPr lang="he-IL" sz="1100" dirty="0">
+              <a:solidFill>
+                <a:srgbClr val="C00000"/>
+              </a:solidFill>
             </a:endParaRPr>
           </a:p>
         </p:txBody>
       </p:sp>
-      <p:pic>
-        <p:nvPicPr>
-          <p:cNvPr id="34" name="תמונה 33">
-            <a:extLst>
-              <a:ext uri="{FF2B5EF4-FFF2-40B4-BE49-F238E27FC236}">
-                <a16:creationId xmlns:a16="http://schemas.microsoft.com/office/drawing/2014/main" id="{25C37274-1FE6-3177-963F-D4F06EFDC1F4}"/>
-              </a:ext>
-            </a:extLst>
-          </p:cNvPr>
-          <p:cNvPicPr>
-            <a:picLocks noChangeAspect="1"/>
-          </p:cNvPicPr>
-          <p:nvPr/>
-        </p:nvPicPr>
-        <p:blipFill>
-          <a:blip r:embed="rId5"/>
-          <a:stretch>
-            <a:fillRect/>
-          </a:stretch>
-        </p:blipFill>
-        <p:spPr>
-          <a:xfrm>
-            <a:off x="-3961493" y="5516562"/>
-            <a:ext cx="5397500" cy="1066800"/>
-          </a:xfrm>
-          <a:prstGeom prst="rect">
-            <a:avLst/>
-          </a:prstGeom>
-        </p:spPr>
-      </p:pic>
     </p:spTree>
     <p:extLst>
       <p:ext uri="{BB962C8B-B14F-4D97-AF65-F5344CB8AC3E}">
-        <p14:creationId xmlns:p14="http://schemas.microsoft.com/office/powerpoint/2010/main" val="4214760885"/>
+        <p14:creationId xmlns:p14="http://schemas.microsoft.com/office/powerpoint/2010/main" val="2916714586"/>
       </p:ext>
     </p:extLst>
   </p:cSld>
@@ -5412,7 +6576,7 @@
 </p:sld>
 </file>
 
-<file path=ppt/slides/slide14.xml><?xml version="1.0" encoding="utf-8"?>
+<file path=ppt/slides/slide15.xml><?xml version="1.0" encoding="utf-8"?>
 <p:sld xmlns:a="http://schemas.openxmlformats.org/drawingml/2006/main" xmlns:r="http://schemas.openxmlformats.org/officeDocument/2006/relationships" xmlns:p="http://schemas.openxmlformats.org/presentationml/2006/main">
   <p:cSld>
     <p:bg>
@@ -5822,13 +6986,98 @@
           <a:lstStyle/>
           <a:p>
             <a:r>
-              <a:rPr sz="4000" b="1">
-                <a:solidFill>
-                  <a:srgbClr val="FFFFFF"/>
-                </a:solidFill>
-              </a:rPr>
-              <a:t>שקף דרישות – מה מומש ומה לא</a:t>
-            </a:r>
+              <a:rPr sz="4000" b="1" dirty="0" err="1">
+                <a:solidFill>
+                  <a:srgbClr val="FFFFFF"/>
+                </a:solidFill>
+              </a:rPr>
+              <a:t>שקף</a:t>
+            </a:r>
+            <a:r>
+              <a:rPr sz="4000" b="1" dirty="0">
+                <a:solidFill>
+                  <a:srgbClr val="FFFFFF"/>
+                </a:solidFill>
+              </a:rPr>
+              <a:t> </a:t>
+            </a:r>
+            <a:r>
+              <a:rPr sz="4000" b="1" dirty="0" err="1">
+                <a:solidFill>
+                  <a:srgbClr val="FFFFFF"/>
+                </a:solidFill>
+              </a:rPr>
+              <a:t>דרישות</a:t>
+            </a:r>
+            <a:r>
+              <a:rPr sz="4000" b="1" dirty="0">
+                <a:solidFill>
+                  <a:srgbClr val="FFFFFF"/>
+                </a:solidFill>
+              </a:rPr>
+              <a:t> – </a:t>
+            </a:r>
+            <a:r>
+              <a:rPr sz="4000" b="1" dirty="0" err="1">
+                <a:solidFill>
+                  <a:srgbClr val="FFFFFF"/>
+                </a:solidFill>
+              </a:rPr>
+              <a:t>מה</a:t>
+            </a:r>
+            <a:r>
+              <a:rPr sz="4000" b="1" dirty="0">
+                <a:solidFill>
+                  <a:srgbClr val="FFFFFF"/>
+                </a:solidFill>
+              </a:rPr>
+              <a:t> </a:t>
+            </a:r>
+            <a:r>
+              <a:rPr sz="4000" b="1" dirty="0" err="1">
+                <a:solidFill>
+                  <a:srgbClr val="FFFFFF"/>
+                </a:solidFill>
+              </a:rPr>
+              <a:t>מומש</a:t>
+            </a:r>
+            <a:r>
+              <a:rPr sz="4000" b="1" dirty="0">
+                <a:solidFill>
+                  <a:srgbClr val="FFFFFF"/>
+                </a:solidFill>
+              </a:rPr>
+              <a:t> </a:t>
+            </a:r>
+            <a:r>
+              <a:rPr sz="4000" b="1" dirty="0" err="1">
+                <a:solidFill>
+                  <a:srgbClr val="FFFFFF"/>
+                </a:solidFill>
+              </a:rPr>
+              <a:t>ומה</a:t>
+            </a:r>
+            <a:r>
+              <a:rPr sz="4000" b="1" dirty="0">
+                <a:solidFill>
+                  <a:srgbClr val="FFFFFF"/>
+                </a:solidFill>
+              </a:rPr>
+              <a:t> </a:t>
+            </a:r>
+            <a:r>
+              <a:rPr sz="4000" b="1" dirty="0" err="1">
+                <a:solidFill>
+                  <a:srgbClr val="FFFFFF"/>
+                </a:solidFill>
+              </a:rPr>
+              <a:t>לא</a:t>
+            </a:r>
+            <a:endParaRPr sz="4000" b="1" dirty="0">
+              <a:solidFill>
+                <a:srgbClr val="FFFFFF"/>
+              </a:solidFill>
+            </a:endParaRPr>
           </a:p>
         </p:txBody>
       </p:sp>
@@ -6169,7 +7418,7 @@
                   <a:srgbClr val="E6E6E6"/>
                 </a:solidFill>
               </a:rPr>
-              <a:t> המכיל ומשתמש ב</a:t>
+              <a:t> - מכיל ומשתמש ב</a:t>
             </a:r>
             <a:r>
               <a:rPr lang="en" sz="1400" dirty="0">
@@ -6897,6 +8146,7 @@
                 <a:solidFill>
                   <a:srgbClr val="FFFFFF"/>
                 </a:solidFill>
+                <a:cs typeface="+mn-cs"/>
               </a:rPr>
               <a:t>הוראות</a:t>
             </a:r>
@@ -6905,6 +8155,7 @@
                 <a:solidFill>
                   <a:srgbClr val="FFFFFF"/>
                 </a:solidFill>
+                <a:cs typeface="+mn-cs"/>
               </a:rPr>
               <a:t> </a:t>
             </a:r>
@@ -6913,6 +8164,7 @@
                 <a:solidFill>
                   <a:srgbClr val="FFFFFF"/>
                 </a:solidFill>
+                <a:cs typeface="+mn-cs"/>
               </a:rPr>
               <a:t>התקנה</a:t>
             </a:r>
@@ -6921,6 +8173,7 @@
                 <a:solidFill>
                   <a:srgbClr val="FFFFFF"/>
                 </a:solidFill>
+                <a:cs typeface="+mn-cs"/>
               </a:rPr>
               <a:t> </a:t>
             </a:r>
@@ -6929,6 +8182,7 @@
                 <a:solidFill>
                   <a:srgbClr val="FFFFFF"/>
                 </a:solidFill>
+                <a:cs typeface="+mn-cs"/>
               </a:rPr>
               <a:t>והרצה</a:t>
             </a:r>
@@ -6936,6 +8190,7 @@
               <a:solidFill>
                 <a:srgbClr val="FFFFFF"/>
               </a:solidFill>
+              <a:cs typeface="+mn-cs"/>
             </a:endParaRPr>
           </a:p>
         </p:txBody>
@@ -7472,7 +8727,7 @@
                   <a:srgbClr val="E6E6E6"/>
                 </a:solidFill>
               </a:rPr>
-              <a:t>, תוך דילוג על </a:t>
+              <a:t>. סך </a:t>
             </a:r>
             <a:r>
               <a:rPr lang="he-IL" sz="1600" dirty="0" err="1">
@@ -7480,6 +8735,22 @@
                   <a:srgbClr val="E6E6E6"/>
                 </a:solidFill>
               </a:rPr>
+              <a:t>הכל</a:t>
+            </a:r>
+            <a:r>
+              <a:rPr lang="he-IL" sz="1600" dirty="0">
+                <a:solidFill>
+                  <a:srgbClr val="E6E6E6"/>
+                </a:solidFill>
+              </a:rPr>
+              <a:t> יהיה בבלוק 50 </a:t>
+            </a:r>
+            <a:r>
+              <a:rPr lang="he-IL" sz="1600" dirty="0" err="1">
+                <a:solidFill>
+                  <a:srgbClr val="E6E6E6"/>
+                </a:solidFill>
+              </a:rPr>
               <a:t>טרנזקציות</a:t>
             </a:r>
             <a:r>
@@ -7488,7 +8759,23 @@
                   <a:srgbClr val="E6E6E6"/>
                 </a:solidFill>
               </a:rPr>
-              <a:t> לא חוקיות וכתיבה שלה כמה </a:t>
+              <a:t> לא כולל </a:t>
+            </a:r>
+            <a:r>
+              <a:rPr lang="en-US" sz="1600" dirty="0" err="1">
+                <a:solidFill>
+                  <a:srgbClr val="E6E6E6"/>
+                </a:solidFill>
+              </a:rPr>
+              <a:t>coinbase</a:t>
+            </a:r>
+            <a:r>
+              <a:rPr lang="he-IL" sz="1600" dirty="0">
+                <a:solidFill>
+                  <a:srgbClr val="E6E6E6"/>
+                </a:solidFill>
+              </a:rPr>
+              <a:t> אלא אם לא היו עוד </a:t>
             </a:r>
             <a:r>
               <a:rPr lang="he-IL" sz="1600" dirty="0" err="1">
@@ -7496,6 +8783,22 @@
                   <a:srgbClr val="E6E6E6"/>
                 </a:solidFill>
               </a:rPr>
+              <a:t>טרנזקיות</a:t>
+            </a:r>
+            <a:r>
+              <a:rPr lang="he-IL" sz="1600" dirty="0">
+                <a:solidFill>
+                  <a:srgbClr val="E6E6E6"/>
+                </a:solidFill>
+              </a:rPr>
+              <a:t> במאגר, </a:t>
+            </a:r>
+            <a:r>
+              <a:rPr lang="he-IL" sz="1600" dirty="0" err="1">
+                <a:solidFill>
+                  <a:srgbClr val="E6E6E6"/>
+                </a:solidFill>
+              </a:rPr>
               <a:t>טרנזקציות</a:t>
             </a:r>
             <a:r>
@@ -7504,7 +8807,23 @@
                   <a:srgbClr val="E6E6E6"/>
                 </a:solidFill>
               </a:rPr>
-              <a:t> דולגו ואיזה. סך </a:t>
+              <a:t> ה</a:t>
+            </a:r>
+            <a:r>
+              <a:rPr lang="en-US" sz="1600" dirty="0" err="1">
+                <a:solidFill>
+                  <a:srgbClr val="E6E6E6"/>
+                </a:solidFill>
+              </a:rPr>
+              <a:t>coinbase</a:t>
+            </a:r>
+            <a:r>
+              <a:rPr lang="he-IL" sz="1600" dirty="0">
+                <a:solidFill>
+                  <a:srgbClr val="E6E6E6"/>
+                </a:solidFill>
+              </a:rPr>
+              <a:t> יכנסו לסוף התור של </a:t>
             </a:r>
             <a:r>
               <a:rPr lang="he-IL" sz="1600" dirty="0" err="1">
@@ -7512,7 +8831,7 @@
                   <a:srgbClr val="E6E6E6"/>
                 </a:solidFill>
               </a:rPr>
-              <a:t>הכל</a:t>
+              <a:t>הטרנזקציות</a:t>
             </a:r>
             <a:r>
               <a:rPr lang="he-IL" sz="1600" dirty="0">
@@ -7520,55 +8839,7 @@
                   <a:srgbClr val="E6E6E6"/>
                 </a:solidFill>
               </a:rPr>
-              <a:t> יהיה בבלוק 50 </a:t>
-            </a:r>
-            <a:r>
-              <a:rPr lang="he-IL" sz="1600" dirty="0" err="1">
-                <a:solidFill>
-                  <a:srgbClr val="E6E6E6"/>
-                </a:solidFill>
-              </a:rPr>
-              <a:t>טרנזקציות</a:t>
-            </a:r>
-            <a:r>
-              <a:rPr lang="he-IL" sz="1600" dirty="0">
-                <a:solidFill>
-                  <a:srgbClr val="E6E6E6"/>
-                </a:solidFill>
-              </a:rPr>
-              <a:t> כולל </a:t>
-            </a:r>
-            <a:r>
-              <a:rPr lang="en-US" sz="1600" dirty="0" err="1">
-                <a:solidFill>
-                  <a:srgbClr val="E6E6E6"/>
-                </a:solidFill>
-              </a:rPr>
-              <a:t>coinbase</a:t>
-            </a:r>
-            <a:r>
-              <a:rPr lang="he-IL" sz="1600" dirty="0">
-                <a:solidFill>
-                  <a:srgbClr val="E6E6E6"/>
-                </a:solidFill>
-              </a:rPr>
-              <a:t> אלא אם לא היו עוד </a:t>
-            </a:r>
-            <a:r>
-              <a:rPr lang="he-IL" sz="1600" dirty="0" err="1">
-                <a:solidFill>
-                  <a:srgbClr val="E6E6E6"/>
-                </a:solidFill>
-              </a:rPr>
-              <a:t>טרנזקיות</a:t>
-            </a:r>
-            <a:r>
-              <a:rPr lang="he-IL" sz="1600" dirty="0">
-                <a:solidFill>
-                  <a:srgbClr val="E6E6E6"/>
-                </a:solidFill>
-              </a:rPr>
-              <a:t> במאגר.</a:t>
+              <a:t> ויעובדו בסוף.</a:t>
             </a:r>
           </a:p>
           <a:p>
@@ -7993,6 +9264,8 @@
                 <a:solidFill>
                   <a:srgbClr val="FFFFFF"/>
                 </a:solidFill>
+                <a:latin typeface="Calibri" panose="020F0502020204030204" pitchFamily="34" charset="0"/>
+                <a:cs typeface="Calibri" panose="020F0502020204030204" pitchFamily="34" charset="0"/>
               </a:rPr>
               <a:t>דוגמא לפלט</a:t>
             </a:r>
@@ -8000,6 +9273,8 @@
               <a:solidFill>
                 <a:srgbClr val="FFFFFF"/>
               </a:solidFill>
+              <a:latin typeface="Calibri" panose="020F0502020204030204" pitchFamily="34" charset="0"/>
+              <a:cs typeface="Calibri" panose="020F0502020204030204" pitchFamily="34" charset="0"/>
             </a:endParaRPr>
           </a:p>
         </p:txBody>
@@ -8088,13 +9363,82 @@
           <a:lstStyle/>
           <a:p>
             <a:r>
-              <a:rPr sz="4000" b="1">
-                <a:solidFill>
-                  <a:srgbClr val="FFFFFF"/>
-                </a:solidFill>
-              </a:rPr>
-              <a:t>תמונת מצב – קבצי הפרויקט ותפקידם</a:t>
-            </a:r>
+              <a:rPr sz="4000" b="1" dirty="0" err="1">
+                <a:solidFill>
+                  <a:srgbClr val="FFFFFF"/>
+                </a:solidFill>
+              </a:rPr>
+              <a:t>תמונת</a:t>
+            </a:r>
+            <a:r>
+              <a:rPr sz="4000" b="1" dirty="0">
+                <a:solidFill>
+                  <a:srgbClr val="FFFFFF"/>
+                </a:solidFill>
+              </a:rPr>
+              <a:t> </a:t>
+            </a:r>
+            <a:r>
+              <a:rPr sz="4000" b="1" dirty="0" err="1">
+                <a:solidFill>
+                  <a:srgbClr val="FFFFFF"/>
+                </a:solidFill>
+              </a:rPr>
+              <a:t>מצב</a:t>
+            </a:r>
+            <a:r>
+              <a:rPr sz="4000" b="1" dirty="0">
+                <a:solidFill>
+                  <a:srgbClr val="FFFFFF"/>
+                </a:solidFill>
+              </a:rPr>
+              <a:t> – </a:t>
+            </a:r>
+            <a:r>
+              <a:rPr sz="4000" b="1" dirty="0" err="1">
+                <a:solidFill>
+                  <a:srgbClr val="FFFFFF"/>
+                </a:solidFill>
+              </a:rPr>
+              <a:t>קבצי</a:t>
+            </a:r>
+            <a:r>
+              <a:rPr sz="4000" b="1" dirty="0">
+                <a:solidFill>
+                  <a:srgbClr val="FFFFFF"/>
+                </a:solidFill>
+              </a:rPr>
+              <a:t> </a:t>
+            </a:r>
+            <a:r>
+              <a:rPr sz="4000" b="1" dirty="0" err="1">
+                <a:solidFill>
+                  <a:srgbClr val="FFFFFF"/>
+                </a:solidFill>
+              </a:rPr>
+              <a:t>הפרויקט</a:t>
+            </a:r>
+            <a:r>
+              <a:rPr sz="4000" b="1" dirty="0">
+                <a:solidFill>
+                  <a:srgbClr val="FFFFFF"/>
+                </a:solidFill>
+              </a:rPr>
+              <a:t> </a:t>
+            </a:r>
+            <a:r>
+              <a:rPr sz="4000" b="1" dirty="0" err="1">
+                <a:solidFill>
+                  <a:srgbClr val="FFFFFF"/>
+                </a:solidFill>
+              </a:rPr>
+              <a:t>ותפקידם</a:t>
+            </a:r>
+            <a:endParaRPr sz="4000" b="1" dirty="0">
+              <a:solidFill>
+                <a:srgbClr val="FFFFFF"/>
+              </a:solidFill>
+            </a:endParaRPr>
           </a:p>
         </p:txBody>
       </p:sp>
@@ -8116,8 +9460,8 @@
         </p:nvSpPr>
         <p:spPr bwMode="auto">
           <a:xfrm>
-            <a:off x="616962" y="1720020"/>
-            <a:ext cx="8069838" cy="2677656"/>
+            <a:off x="155747" y="1504578"/>
+            <a:ext cx="8531053" cy="3108543"/>
           </a:xfrm>
           <a:prstGeom prst="rect">
             <a:avLst/>
@@ -8402,6 +9746,202 @@
             </a:endParaRPr>
           </a:p>
           <a:p>
+            <a:pPr marL="0" indent="0" algn="r" defTabSz="914400" rtl="1" eaLnBrk="0" fontAlgn="base" hangingPunct="0">
+              <a:spcBef>
+                <a:spcPct val="0"/>
+              </a:spcBef>
+              <a:spcAft>
+                <a:spcPct val="0"/>
+              </a:spcAft>
+              <a:buFontTx/>
+              <a:buChar char="•"/>
+            </a:pPr>
+            <a:r>
+              <a:rPr kumimoji="0" lang="he-IL" altLang="he-IL" sz="1400" b="0" i="0" u="none" strike="noStrike" cap="none" normalizeH="0" baseline="0" dirty="0" err="1">
+                <a:ln>
+                  <a:noFill/>
+                </a:ln>
+                <a:solidFill>
+                  <a:schemeClr val="bg1"/>
+                </a:solidFill>
+                <a:effectLst/>
+                <a:latin typeface="Arial Unicode MS" panose="020B0604020202020204" pitchFamily="34" charset="-128"/>
+              </a:rPr>
+              <a:t>transaction</a:t>
+            </a:r>
+            <a:r>
+              <a:rPr lang="en" sz="1400" dirty="0">
+                <a:solidFill>
+                  <a:schemeClr val="bg1"/>
+                </a:solidFill>
+                <a:cs typeface="Arial" panose="020B0604020202020204" pitchFamily="34" charset="0"/>
+              </a:rPr>
+              <a:t>.</a:t>
+            </a:r>
+            <a:r>
+              <a:rPr lang="en" sz="1400" dirty="0" err="1">
+                <a:solidFill>
+                  <a:schemeClr val="bg1"/>
+                </a:solidFill>
+                <a:cs typeface="Arial" panose="020B0604020202020204" pitchFamily="34" charset="0"/>
+              </a:rPr>
+              <a:t>js</a:t>
+            </a:r>
+            <a:r>
+              <a:rPr lang="en" sz="1400" dirty="0">
+                <a:solidFill>
+                  <a:schemeClr val="bg1"/>
+                </a:solidFill>
+                <a:cs typeface="Arial" panose="020B0604020202020204" pitchFamily="34" charset="0"/>
+              </a:rPr>
+              <a:t> – </a:t>
+            </a:r>
+            <a:r>
+              <a:rPr lang="he-IL" sz="1400" dirty="0">
+                <a:solidFill>
+                  <a:schemeClr val="bg1"/>
+                </a:solidFill>
+                <a:cs typeface="Arial" panose="020B0604020202020204" pitchFamily="34" charset="0"/>
+              </a:rPr>
+              <a:t> - מגדיר </a:t>
+            </a:r>
+            <a:r>
+              <a:rPr lang="he-IL" sz="1400" dirty="0" err="1">
+                <a:solidFill>
+                  <a:schemeClr val="bg1"/>
+                </a:solidFill>
+                <a:cs typeface="Arial" panose="020B0604020202020204" pitchFamily="34" charset="0"/>
+              </a:rPr>
+              <a:t>טרנזקציה</a:t>
+            </a:r>
+            <a:r>
+              <a:rPr lang="he-IL" sz="1400" dirty="0">
+                <a:solidFill>
+                  <a:schemeClr val="bg1"/>
+                </a:solidFill>
+                <a:cs typeface="Arial" panose="020B0604020202020204" pitchFamily="34" charset="0"/>
+              </a:rPr>
+              <a:t> אחת, הכוללת כתובת שולח, כתובת מקבל, סכום, עמלות (</a:t>
+            </a:r>
+            <a:r>
+              <a:rPr lang="en" sz="1400" dirty="0" err="1">
+                <a:solidFill>
+                  <a:schemeClr val="bg1"/>
+                </a:solidFill>
+                <a:cs typeface="Arial" panose="020B0604020202020204" pitchFamily="34" charset="0"/>
+              </a:rPr>
+              <a:t>baseFee</a:t>
+            </a:r>
+            <a:r>
+              <a:rPr lang="he-IL" sz="1400" dirty="0">
+                <a:solidFill>
+                  <a:schemeClr val="bg1"/>
+                </a:solidFill>
+                <a:cs typeface="Arial" panose="020B0604020202020204" pitchFamily="34" charset="0"/>
+              </a:rPr>
+              <a:t> ו-</a:t>
+            </a:r>
+            <a:r>
+              <a:rPr lang="en" sz="1400" dirty="0">
+                <a:solidFill>
+                  <a:schemeClr val="bg1"/>
+                </a:solidFill>
+                <a:cs typeface="Arial" panose="020B0604020202020204" pitchFamily="34" charset="0"/>
+              </a:rPr>
+              <a:t> </a:t>
+            </a:r>
+            <a:r>
+              <a:rPr lang="en" sz="1400" dirty="0" err="1">
+                <a:solidFill>
+                  <a:schemeClr val="bg1"/>
+                </a:solidFill>
+                <a:cs typeface="Arial" panose="020B0604020202020204" pitchFamily="34" charset="0"/>
+              </a:rPr>
+              <a:t>tipFee</a:t>
+            </a:r>
+            <a:r>
+              <a:rPr lang="he-IL" sz="1400" dirty="0">
+                <a:solidFill>
+                  <a:schemeClr val="bg1"/>
+                </a:solidFill>
+                <a:cs typeface="Arial" panose="020B0604020202020204" pitchFamily="34" charset="0"/>
+              </a:rPr>
+              <a:t>), </a:t>
+            </a:r>
+            <a:r>
+              <a:rPr lang="en-US" sz="1400" dirty="0">
+                <a:solidFill>
+                  <a:schemeClr val="bg1"/>
+                </a:solidFill>
+                <a:cs typeface="Arial" panose="020B0604020202020204" pitchFamily="34" charset="0"/>
+              </a:rPr>
+              <a:t>hash</a:t>
+            </a:r>
+            <a:r>
+              <a:rPr lang="he-IL" sz="1400" dirty="0">
+                <a:solidFill>
+                  <a:schemeClr val="bg1"/>
+                </a:solidFill>
+                <a:cs typeface="Arial" panose="020B0604020202020204" pitchFamily="34" charset="0"/>
+              </a:rPr>
+              <a:t>,</a:t>
+            </a:r>
+            <a:br>
+              <a:rPr lang="en-US" sz="1400" dirty="0">
+                <a:solidFill>
+                  <a:schemeClr val="bg1"/>
+                </a:solidFill>
+                <a:cs typeface="Arial" panose="020B0604020202020204" pitchFamily="34" charset="0"/>
+              </a:rPr>
+            </a:br>
+            <a:r>
+              <a:rPr lang="en" sz="1400" dirty="0">
+                <a:solidFill>
+                  <a:schemeClr val="bg1"/>
+                </a:solidFill>
+                <a:cs typeface="Arial" panose="020B0604020202020204" pitchFamily="34" charset="0"/>
+              </a:rPr>
+              <a:t>nonce </a:t>
+            </a:r>
+            <a:r>
+              <a:rPr lang="he-IL" sz="1400" dirty="0">
+                <a:solidFill>
+                  <a:schemeClr val="bg1"/>
+                </a:solidFill>
+                <a:cs typeface="Arial" panose="020B0604020202020204" pitchFamily="34" charset="0"/>
+              </a:rPr>
+              <a:t> ואת הלוגיקה לחישוב </a:t>
+            </a:r>
+            <a:r>
+              <a:rPr lang="en-US" sz="1400" dirty="0">
+                <a:solidFill>
+                  <a:schemeClr val="bg1"/>
+                </a:solidFill>
+                <a:cs typeface="Arial" panose="020B0604020202020204" pitchFamily="34" charset="0"/>
+              </a:rPr>
+              <a:t>hash</a:t>
+            </a:r>
+            <a:r>
+              <a:rPr lang="he-IL" sz="1400" dirty="0">
+                <a:solidFill>
+                  <a:schemeClr val="bg1"/>
+                </a:solidFill>
+                <a:cs typeface="Arial" panose="020B0604020202020204" pitchFamily="34" charset="0"/>
+              </a:rPr>
+              <a:t>, חתימה בעזרת המפתח הפרטי של השולח ובדיקת תקינות החתימה.</a:t>
+            </a:r>
+            <a:endParaRPr kumimoji="0" lang="he-IL" altLang="he-IL" sz="1400" b="0" i="0" u="none" strike="noStrike" cap="none" normalizeH="0" baseline="0" dirty="0">
+              <a:ln>
+                <a:noFill/>
+              </a:ln>
+              <a:solidFill>
+                <a:schemeClr val="bg1"/>
+              </a:solidFill>
+              <a:effectLst/>
+              <a:cs typeface="Arial" panose="020B0604020202020204" pitchFamily="34" charset="0"/>
+            </a:endParaRPr>
+          </a:p>
+          <a:p>
             <a:pPr marL="0" marR="0" lvl="0" indent="0" algn="r" defTabSz="914400" rtl="1" eaLnBrk="0" fontAlgn="base" latinLnBrk="0" hangingPunct="0">
               <a:lnSpc>
                 <a:spcPct val="100000"/>
@@ -8429,7 +9969,7 @@
                 <a:effectLst/>
                 <a:latin typeface="Arial Unicode MS" panose="020B0604020202020204" pitchFamily="34" charset="-128"/>
               </a:rPr>
-              <a:t>transaction.js</a:t>
+              <a:t>wallet.js</a:t>
             </a:r>
             <a:r>
               <a:rPr kumimoji="0" lang="he-IL" altLang="he-IL" sz="1400" b="0" i="0" u="none" strike="noStrike" cap="none" normalizeH="0" baseline="0" dirty="0">
@@ -8441,7 +9981,7 @@
                 </a:solidFill>
                 <a:effectLst/>
               </a:rPr>
-              <a:t> – </a:t>
+              <a:t> –</a:t>
             </a:r>
             <a:r>
               <a:rPr kumimoji="0" lang="he-IL" altLang="he-IL" sz="1400" b="0" i="0" u="none" strike="noStrike" cap="none" normalizeH="0" baseline="0" dirty="0">
@@ -8454,20 +9994,7 @@
                 <a:effectLst/>
                 <a:cs typeface="Arial" panose="020B0604020202020204" pitchFamily="34" charset="0"/>
               </a:rPr>
-              <a:t>מגדיר </a:t>
-            </a:r>
-            <a:r>
-              <a:rPr kumimoji="0" lang="he-IL" altLang="he-IL" sz="1400" b="0" i="0" u="none" strike="noStrike" cap="none" normalizeH="0" baseline="0" dirty="0" err="1">
-                <a:ln>
-                  <a:noFill/>
-                </a:ln>
-                <a:solidFill>
-                  <a:schemeClr val="bg1"/>
-                </a:solidFill>
-                <a:effectLst/>
-                <a:cs typeface="Arial" panose="020B0604020202020204" pitchFamily="34" charset="0"/>
-              </a:rPr>
-              <a:t>טרנזקציה</a:t>
+              <a:t>גוזר מפתח פרטי/ציבורי על</a:t>
             </a:r>
             <a:r>
               <a:rPr kumimoji="0" lang="he-IL" altLang="he-IL" sz="1400" b="0" i="0" u="none" strike="noStrike" cap="none" normalizeH="0" baseline="0" dirty="0">
@@ -8478,9 +10005,8 @@
                   <a:schemeClr val="bg1"/>
                 </a:solidFill>
                 <a:effectLst/>
-                <a:cs typeface="Arial" panose="020B0604020202020204" pitchFamily="34" charset="0"/>
-              </a:rPr>
-              <a:t> אחת, כולל חישוב</a:t>
+              </a:rPr>
+              <a:t> secp256k1 </a:t>
             </a:r>
             <a:r>
               <a:rPr kumimoji="0" lang="he-IL" altLang="he-IL" sz="1400" b="0" i="0" u="none" strike="noStrike" cap="none" normalizeH="0" baseline="0" dirty="0">
@@ -8491,69 +10017,9 @@
                   <a:schemeClr val="bg1"/>
                 </a:solidFill>
                 <a:effectLst/>
-              </a:rPr>
-              <a:t> </a:t>
-            </a:r>
-            <a:r>
-              <a:rPr kumimoji="0" lang="he-IL" altLang="he-IL" sz="1400" b="0" i="0" u="none" strike="noStrike" cap="none" normalizeH="0" baseline="0" dirty="0" err="1">
-                <a:ln>
-                  <a:noFill/>
-                </a:ln>
-                <a:solidFill>
-                  <a:schemeClr val="bg1"/>
-                </a:solidFill>
-                <a:effectLst/>
-              </a:rPr>
-              <a:t>hash</a:t>
-            </a:r>
-            <a:r>
-              <a:rPr kumimoji="0" lang="he-IL" altLang="he-IL" sz="1400" b="0" i="0" u="none" strike="noStrike" cap="none" normalizeH="0" baseline="0" dirty="0">
-                <a:ln>
-                  <a:noFill/>
-                </a:ln>
-                <a:solidFill>
-                  <a:schemeClr val="bg1"/>
-                </a:solidFill>
-                <a:effectLst/>
-              </a:rPr>
-              <a:t>, </a:t>
-            </a:r>
-            <a:r>
-              <a:rPr kumimoji="0" lang="he-IL" altLang="he-IL" sz="1400" b="0" i="0" u="none" strike="noStrike" cap="none" normalizeH="0" baseline="0" dirty="0" err="1">
-                <a:ln>
-                  <a:noFill/>
-                </a:ln>
-                <a:solidFill>
-                  <a:schemeClr val="bg1"/>
-                </a:solidFill>
-                <a:effectLst/>
-              </a:rPr>
-              <a:t>nonce</a:t>
-            </a:r>
-            <a:r>
-              <a:rPr kumimoji="0" lang="he-IL" altLang="he-IL" sz="1400" b="0" i="0" u="none" strike="noStrike" cap="none" normalizeH="0" baseline="0" dirty="0">
-                <a:ln>
-                  <a:noFill/>
-                </a:ln>
-                <a:solidFill>
-                  <a:schemeClr val="bg1"/>
-                </a:solidFill>
-                <a:effectLst/>
-              </a:rPr>
-              <a:t>, </a:t>
-            </a:r>
-            <a:r>
-              <a:rPr kumimoji="0" lang="he-IL" altLang="he-IL" sz="1400" b="0" i="0" u="none" strike="noStrike" cap="none" normalizeH="0" baseline="0" dirty="0">
-                <a:ln>
-                  <a:noFill/>
-                </a:ln>
-                <a:solidFill>
-                  <a:schemeClr val="bg1"/>
-                </a:solidFill>
-                <a:effectLst/>
                 <a:cs typeface="Arial" panose="020B0604020202020204" pitchFamily="34" charset="0"/>
               </a:rPr>
-              <a:t>חתימה ובדיקת תקינות החתימה</a:t>
+              <a:t>ומפיק כתובת ציבורית</a:t>
             </a:r>
             <a:r>
               <a:rPr kumimoji="0" lang="he-IL" altLang="he-IL" sz="1400" b="0" i="0" u="none" strike="noStrike" cap="none" normalizeH="0" baseline="0" dirty="0">
@@ -8576,6 +10042,139 @@
               </a:solidFill>
               <a:effectLst/>
               <a:latin typeface="Arial" panose="020B0604020202020204" pitchFamily="34" charset="0"/>
+            </a:endParaRPr>
+          </a:p>
+          <a:p>
+            <a:pPr marL="0" lvl="0" indent="0" algn="r" defTabSz="914400" rtl="1" eaLnBrk="0" fontAlgn="base" hangingPunct="0">
+              <a:spcBef>
+                <a:spcPct val="0"/>
+              </a:spcBef>
+              <a:spcAft>
+                <a:spcPct val="0"/>
+              </a:spcAft>
+              <a:buFontTx/>
+              <a:buChar char="•"/>
+            </a:pPr>
+            <a:r>
+              <a:rPr kumimoji="0" lang="he-IL" altLang="he-IL" sz="1400" b="0" i="0" u="none" strike="noStrike" cap="none" normalizeH="0" baseline="0" dirty="0" err="1">
+                <a:ln>
+                  <a:noFill/>
+                </a:ln>
+                <a:solidFill>
+                  <a:schemeClr val="bg1"/>
+                </a:solidFill>
+                <a:effectLst/>
+                <a:latin typeface="Arial Unicode MS" panose="020B0604020202020204" pitchFamily="34" charset="-128"/>
+              </a:rPr>
+              <a:t>transactionProcessor.js</a:t>
+            </a:r>
+            <a:r>
+              <a:rPr kumimoji="0" lang="he-IL" altLang="he-IL" sz="1400" b="0" i="0" u="none" strike="noStrike" cap="none" normalizeH="0" baseline="0" dirty="0">
+                <a:ln>
+                  <a:noFill/>
+                </a:ln>
+                <a:solidFill>
+                  <a:schemeClr val="bg1"/>
+                </a:solidFill>
+                <a:effectLst/>
+              </a:rPr>
+              <a:t> – </a:t>
+            </a:r>
+            <a:r>
+              <a:rPr lang="he-IL" sz="1400" dirty="0">
+                <a:solidFill>
+                  <a:schemeClr val="bg1"/>
+                </a:solidFill>
+                <a:cs typeface="Arial" panose="020B0604020202020204" pitchFamily="34" charset="0"/>
+              </a:rPr>
+              <a:t>מעבד </a:t>
+            </a:r>
+            <a:r>
+              <a:rPr lang="he-IL" sz="1400" dirty="0" err="1">
+                <a:solidFill>
+                  <a:schemeClr val="bg1"/>
+                </a:solidFill>
+                <a:cs typeface="Arial" panose="020B0604020202020204" pitchFamily="34" charset="0"/>
+              </a:rPr>
+              <a:t>טרנזקציות</a:t>
+            </a:r>
+            <a:r>
+              <a:rPr lang="he-IL" sz="1400" dirty="0">
+                <a:solidFill>
+                  <a:schemeClr val="bg1"/>
+                </a:solidFill>
+                <a:cs typeface="Arial" panose="020B0604020202020204" pitchFamily="34" charset="0"/>
+              </a:rPr>
+              <a:t>, מחיל עמלות ושריפה (</a:t>
+            </a:r>
+            <a:r>
+              <a:rPr lang="en-US" sz="1400" dirty="0" err="1">
+                <a:solidFill>
+                  <a:schemeClr val="bg1"/>
+                </a:solidFill>
+                <a:cs typeface="Arial" panose="020B0604020202020204" pitchFamily="34" charset="0"/>
+              </a:rPr>
+              <a:t>baseFee</a:t>
+            </a:r>
+            <a:r>
+              <a:rPr lang="he-IL" sz="1400" dirty="0">
+                <a:solidFill>
+                  <a:schemeClr val="bg1"/>
+                </a:solidFill>
+                <a:cs typeface="Arial" panose="020B0604020202020204" pitchFamily="34" charset="0"/>
+              </a:rPr>
+              <a:t>) מעדכן </a:t>
+            </a:r>
+            <a:r>
+              <a:rPr lang="en" sz="1400" dirty="0" err="1">
+                <a:solidFill>
+                  <a:schemeClr val="bg1"/>
+                </a:solidFill>
+                <a:cs typeface="Arial" panose="020B0604020202020204" pitchFamily="34" charset="0"/>
+              </a:rPr>
+              <a:t>BalancesState</a:t>
+            </a:r>
+            <a:r>
+              <a:rPr lang="en" sz="1400" dirty="0">
+                <a:solidFill>
+                  <a:schemeClr val="bg1"/>
+                </a:solidFill>
+                <a:cs typeface="Arial" panose="020B0604020202020204" pitchFamily="34" charset="0"/>
+              </a:rPr>
+              <a:t> </a:t>
+            </a:r>
+            <a:r>
+              <a:rPr lang="he-IL" sz="1400" dirty="0">
+                <a:solidFill>
+                  <a:schemeClr val="bg1"/>
+                </a:solidFill>
+                <a:cs typeface="Arial" panose="020B0604020202020204" pitchFamily="34" charset="0"/>
+              </a:rPr>
+              <a:t>ו-</a:t>
+            </a:r>
+            <a:r>
+              <a:rPr lang="en" sz="1400" dirty="0">
+                <a:solidFill>
+                  <a:schemeClr val="bg1"/>
+                </a:solidFill>
+                <a:cs typeface="Arial" panose="020B0604020202020204" pitchFamily="34" charset="0"/>
+              </a:rPr>
+              <a:t>Ledger</a:t>
+            </a:r>
+            <a:r>
+              <a:rPr lang="he-IL" sz="1400" dirty="0">
+                <a:solidFill>
+                  <a:schemeClr val="bg1"/>
+                </a:solidFill>
+                <a:cs typeface="Arial" panose="020B0604020202020204" pitchFamily="34" charset="0"/>
+              </a:rPr>
+              <a:t>.</a:t>
+            </a:r>
+            <a:endParaRPr lang="he-IL" altLang="he-IL" sz="1400" dirty="0">
+              <a:solidFill>
+                <a:schemeClr val="bg1"/>
+              </a:solidFill>
+              <a:cs typeface="Arial" panose="020B0604020202020204" pitchFamily="34" charset="0"/>
             </a:endParaRPr>
           </a:p>
           <a:p>
@@ -8606,7 +10205,7 @@
                 <a:effectLst/>
                 <a:latin typeface="Arial Unicode MS" panose="020B0604020202020204" pitchFamily="34" charset="-128"/>
               </a:rPr>
-              <a:t>wallet.js</a:t>
+              <a:t>balancesState.js</a:t>
             </a:r>
             <a:r>
               <a:rPr kumimoji="0" lang="he-IL" altLang="he-IL" sz="1400" b="0" i="0" u="none" strike="noStrike" cap="none" normalizeH="0" baseline="0" dirty="0">
@@ -8618,7 +10217,7 @@
                 </a:solidFill>
                 <a:effectLst/>
               </a:rPr>
-              <a:t> –</a:t>
+              <a:t> – </a:t>
             </a:r>
             <a:r>
               <a:rPr kumimoji="0" lang="he-IL" altLang="he-IL" sz="1400" b="0" i="0" u="none" strike="noStrike" cap="none" normalizeH="0" baseline="0" dirty="0">
@@ -8631,32 +10230,7 @@
                 <a:effectLst/>
                 <a:cs typeface="Arial" panose="020B0604020202020204" pitchFamily="34" charset="0"/>
               </a:rPr>
-              <a:t>גוזר מפתח פרטי/ציבורי על</a:t>
-            </a:r>
-            <a:r>
-              <a:rPr kumimoji="0" lang="he-IL" altLang="he-IL" sz="1400" b="0" i="0" u="none" strike="noStrike" cap="none" normalizeH="0" baseline="0" dirty="0">
-                <a:ln>
-                  <a:noFill/>
-                </a:ln>
-                <a:solidFill>
-                  <a:schemeClr val="bg1"/>
-                </a:solidFill>
-                <a:effectLst/>
-              </a:rPr>
-              <a:t> secp256k1 </a:t>
-            </a:r>
-            <a:r>
-              <a:rPr kumimoji="0" lang="he-IL" altLang="he-IL" sz="1400" b="0" i="0" u="none" strike="noStrike" cap="none" normalizeH="0" baseline="0" dirty="0">
-                <a:ln>
-                  <a:noFill/>
-                </a:ln>
-                <a:solidFill>
-                  <a:schemeClr val="bg1"/>
-                </a:solidFill>
-                <a:effectLst/>
-                <a:cs typeface="Arial" panose="020B0604020202020204" pitchFamily="34" charset="0"/>
-              </a:rPr>
-              <a:t>ומפיק כתובת ציבורית</a:t>
+              <a:t>מנהל את היתרות של כל ארנק במערכת, כולל חיובים וזיכויים במהלך הריצה</a:t>
             </a:r>
             <a:r>
               <a:rPr kumimoji="0" lang="he-IL" altLang="he-IL" sz="1400" b="0" i="0" u="none" strike="noStrike" cap="none" normalizeH="0" baseline="0" dirty="0">
@@ -8709,7 +10283,7 @@
                 <a:effectLst/>
                 <a:latin typeface="Arial Unicode MS" panose="020B0604020202020204" pitchFamily="34" charset="-128"/>
               </a:rPr>
-              <a:t>transactionProcessor.js</a:t>
+              <a:t>ledger.js</a:t>
             </a:r>
             <a:r>
               <a:rPr kumimoji="0" lang="he-IL" altLang="he-IL" sz="1400" b="0" i="0" u="none" strike="noStrike" cap="none" normalizeH="0" baseline="0" dirty="0">
@@ -8734,95 +10308,7 @@
                 <a:effectLst/>
                 <a:cs typeface="Arial" panose="020B0604020202020204" pitchFamily="34" charset="0"/>
               </a:rPr>
-              <a:t>מעבד </a:t>
-            </a:r>
-            <a:r>
-              <a:rPr kumimoji="0" lang="he-IL" altLang="he-IL" sz="1400" b="0" i="0" u="none" strike="noStrike" cap="none" normalizeH="0" baseline="0" dirty="0" err="1">
-                <a:ln>
-                  <a:noFill/>
-                </a:ln>
-                <a:solidFill>
-                  <a:schemeClr val="bg1"/>
-                </a:solidFill>
-                <a:effectLst/>
-                <a:cs typeface="Arial" panose="020B0604020202020204" pitchFamily="34" charset="0"/>
-              </a:rPr>
-              <a:t>טרנזקציות</a:t>
-            </a:r>
-            <a:r>
-              <a:rPr kumimoji="0" lang="he-IL" altLang="he-IL" sz="1400" b="0" i="0" u="none" strike="noStrike" cap="none" normalizeH="0" baseline="0" dirty="0">
-                <a:ln>
-                  <a:noFill/>
-                </a:ln>
-                <a:solidFill>
-                  <a:schemeClr val="bg1"/>
-                </a:solidFill>
-                <a:effectLst/>
-                <a:cs typeface="Arial" panose="020B0604020202020204" pitchFamily="34" charset="0"/>
-              </a:rPr>
-              <a:t>, בודק יתרה, מיישם עמלות ומוסיף </a:t>
-            </a:r>
-            <a:r>
-              <a:rPr kumimoji="0" lang="he-IL" altLang="he-IL" sz="1400" b="0" i="0" u="none" strike="noStrike" cap="none" normalizeH="0" baseline="0" dirty="0" err="1">
-                <a:ln>
-                  <a:noFill/>
-                </a:ln>
-                <a:solidFill>
-                  <a:schemeClr val="bg1"/>
-                </a:solidFill>
-                <a:effectLst/>
-                <a:cs typeface="Arial" panose="020B0604020202020204" pitchFamily="34" charset="0"/>
-              </a:rPr>
-              <a:t>טרנזקציית</a:t>
-            </a:r>
-            <a:r>
-              <a:rPr kumimoji="0" lang="he-IL" altLang="he-IL" sz="1400" b="0" i="0" u="none" strike="noStrike" cap="none" normalizeH="0" baseline="0" dirty="0">
-                <a:ln>
-                  <a:noFill/>
-                </a:ln>
-                <a:solidFill>
-                  <a:schemeClr val="bg1"/>
-                </a:solidFill>
-                <a:effectLst/>
-              </a:rPr>
-              <a:t> </a:t>
-            </a:r>
-            <a:r>
-              <a:rPr kumimoji="0" lang="he-IL" altLang="he-IL" sz="1400" b="0" i="0" u="none" strike="noStrike" cap="none" normalizeH="0" baseline="0" dirty="0" err="1">
-                <a:ln>
-                  <a:noFill/>
-                </a:ln>
-                <a:solidFill>
-                  <a:schemeClr val="bg1"/>
-                </a:solidFill>
-                <a:effectLst/>
-              </a:rPr>
-              <a:t>coinbase</a:t>
-            </a:r>
-            <a:r>
-              <a:rPr kumimoji="0" lang="he-IL" altLang="he-IL" sz="1400" b="0" i="0" u="none" strike="noStrike" cap="none" normalizeH="0" baseline="0" dirty="0">
-                <a:ln>
-                  <a:noFill/>
-                </a:ln>
-                <a:solidFill>
-                  <a:schemeClr val="bg1"/>
-                </a:solidFill>
-                <a:effectLst/>
-              </a:rPr>
-              <a:t> </a:t>
-            </a:r>
-            <a:r>
-              <a:rPr kumimoji="0" lang="he-IL" altLang="he-IL" sz="1400" b="0" i="0" u="none" strike="noStrike" cap="none" normalizeH="0" baseline="0" dirty="0">
-                <a:ln>
-                  <a:noFill/>
-                </a:ln>
-                <a:solidFill>
-                  <a:schemeClr val="bg1"/>
-                </a:solidFill>
-                <a:effectLst/>
-                <a:cs typeface="Arial" panose="020B0604020202020204" pitchFamily="34" charset="0"/>
-              </a:rPr>
-              <a:t>לבלוק</a:t>
+              <a:t>עוקב אחרי מטבעות שנשרפו ונכרו, מחשב את סך המטבעות ברשת ומדפיס סיכום סופי</a:t>
             </a:r>
             <a:r>
               <a:rPr kumimoji="0" lang="he-IL" altLang="he-IL" sz="1400" b="0" i="0" u="none" strike="noStrike" cap="none" normalizeH="0" baseline="0" dirty="0">
@@ -8875,7 +10361,7 @@
                 <a:effectLst/>
                 <a:latin typeface="Arial Unicode MS" panose="020B0604020202020204" pitchFamily="34" charset="-128"/>
               </a:rPr>
-              <a:t>balancesState.js</a:t>
+              <a:t>miner.js</a:t>
             </a:r>
             <a:r>
               <a:rPr kumimoji="0" lang="he-IL" altLang="he-IL" sz="1400" b="0" i="0" u="none" strike="noStrike" cap="none" normalizeH="0" baseline="0" dirty="0">
@@ -8900,30 +10386,35 @@
                 <a:effectLst/>
                 <a:cs typeface="Arial" panose="020B0604020202020204" pitchFamily="34" charset="0"/>
               </a:rPr>
-              <a:t>מנהל את היתרות של כל ארנק במערכת, כולל חיובים וזיכויים במהלך הריצה</a:t>
-            </a:r>
-            <a:r>
-              <a:rPr kumimoji="0" lang="he-IL" altLang="he-IL" sz="1400" b="0" i="0" u="none" strike="noStrike" cap="none" normalizeH="0" baseline="0" dirty="0">
-                <a:ln>
-                  <a:noFill/>
-                </a:ln>
-                <a:solidFill>
-                  <a:schemeClr val="bg1"/>
-                </a:solidFill>
-                <a:effectLst/>
+              <a:t>מממש את לוגיק</a:t>
+            </a:r>
+            <a:r>
+              <a:rPr lang="he-IL" altLang="he-IL" sz="1400" dirty="0">
+                <a:solidFill>
+                  <a:schemeClr val="bg1"/>
+                </a:solidFill>
+                <a:cs typeface="Arial" panose="020B0604020202020204" pitchFamily="34" charset="0"/>
+              </a:rPr>
+              <a:t>ת הכורה הבודד שבונה בלוק חדש מתוך רשימת </a:t>
+            </a:r>
+            <a:r>
+              <a:rPr lang="he-IL" altLang="he-IL" sz="1400" dirty="0" err="1">
+                <a:solidFill>
+                  <a:schemeClr val="bg1"/>
+                </a:solidFill>
+                <a:cs typeface="Arial" panose="020B0604020202020204" pitchFamily="34" charset="0"/>
+              </a:rPr>
+              <a:t>הטרנזקציות</a:t>
+            </a:r>
+            <a:r>
+              <a:rPr lang="he-IL" altLang="he-IL" sz="1400" dirty="0">
+                <a:solidFill>
+                  <a:schemeClr val="bg1"/>
+                </a:solidFill>
+                <a:cs typeface="Arial" panose="020B0604020202020204" pitchFamily="34" charset="0"/>
               </a:rPr>
               <a:t>.</a:t>
             </a:r>
-            <a:endParaRPr kumimoji="0" lang="he-IL" altLang="he-IL" sz="1400" b="0" i="0" u="none" strike="noStrike" cap="none" normalizeH="0" baseline="0" dirty="0">
-              <a:ln>
-                <a:noFill/>
-              </a:ln>
-              <a:solidFill>
-                <a:schemeClr val="bg1"/>
-              </a:solidFill>
-              <a:effectLst/>
-              <a:latin typeface="Arial" panose="020B0604020202020204" pitchFamily="34" charset="0"/>
-            </a:endParaRPr>
           </a:p>
           <a:p>
             <a:pPr marL="0" marR="0" lvl="0" indent="0" algn="r" defTabSz="914400" rtl="1" eaLnBrk="0" fontAlgn="base" latinLnBrk="0" hangingPunct="0">
@@ -8943,307 +10434,135 @@
               <a:tabLst/>
             </a:pPr>
             <a:r>
-              <a:rPr kumimoji="0" lang="he-IL" altLang="he-IL" sz="1400" b="0" i="0" u="none" strike="noStrike" cap="none" normalizeH="0" baseline="0" dirty="0" err="1">
-                <a:ln>
-                  <a:noFill/>
-                </a:ln>
-                <a:solidFill>
-                  <a:schemeClr val="bg1"/>
-                </a:solidFill>
-                <a:effectLst/>
-                <a:latin typeface="Arial Unicode MS" panose="020B0604020202020204" pitchFamily="34" charset="-128"/>
-              </a:rPr>
-              <a:t>ledger.js</a:t>
-            </a:r>
-            <a:r>
-              <a:rPr kumimoji="0" lang="he-IL" altLang="he-IL" sz="1400" b="0" i="0" u="none" strike="noStrike" cap="none" normalizeH="0" baseline="0" dirty="0">
-                <a:ln>
-                  <a:noFill/>
-                </a:ln>
-                <a:solidFill>
-                  <a:schemeClr val="bg1"/>
-                </a:solidFill>
-                <a:effectLst/>
-              </a:rPr>
-              <a:t> – </a:t>
-            </a:r>
-            <a:r>
-              <a:rPr kumimoji="0" lang="he-IL" altLang="he-IL" sz="1400" b="0" i="0" u="none" strike="noStrike" cap="none" normalizeH="0" baseline="0" dirty="0">
-                <a:ln>
-                  <a:noFill/>
-                </a:ln>
-                <a:solidFill>
-                  <a:schemeClr val="bg1"/>
-                </a:solidFill>
-                <a:effectLst/>
+              <a:rPr lang="en" sz="1400" dirty="0" err="1">
+                <a:solidFill>
+                  <a:schemeClr val="bg1"/>
+                </a:solidFill>
                 <a:cs typeface="Arial" panose="020B0604020202020204" pitchFamily="34" charset="0"/>
               </a:rPr>
-              <a:t>עוקב אחרי מטבעות שנשרפו ונכרו, מחשב את סך המטבעות ברשת ומדפיס סיכום סופי</a:t>
-            </a:r>
-            <a:r>
-              <a:rPr kumimoji="0" lang="he-IL" altLang="he-IL" sz="1400" b="0" i="0" u="none" strike="noStrike" cap="none" normalizeH="0" baseline="0" dirty="0">
-                <a:ln>
-                  <a:noFill/>
-                </a:ln>
-                <a:solidFill>
-                  <a:schemeClr val="bg1"/>
-                </a:solidFill>
-                <a:effectLst/>
-              </a:rPr>
-              <a:t>.</a:t>
-            </a:r>
-            <a:endParaRPr kumimoji="0" lang="he-IL" altLang="he-IL" sz="1400" b="0" i="0" u="none" strike="noStrike" cap="none" normalizeH="0" baseline="0" dirty="0">
-              <a:ln>
-                <a:noFill/>
-              </a:ln>
+              <a:t>minerScheduler.js</a:t>
+            </a:r>
+            <a:r>
+              <a:rPr lang="he-IL" sz="1400" dirty="0">
+                <a:solidFill>
+                  <a:schemeClr val="bg1"/>
+                </a:solidFill>
+                <a:cs typeface="Arial" panose="020B0604020202020204" pitchFamily="34" charset="0"/>
+              </a:rPr>
+              <a:t> - מנהל תור </a:t>
+            </a:r>
+            <a:r>
+              <a:rPr lang="he-IL" sz="1400" dirty="0" err="1">
+                <a:solidFill>
+                  <a:schemeClr val="bg1"/>
+                </a:solidFill>
+                <a:cs typeface="Arial" panose="020B0604020202020204" pitchFamily="34" charset="0"/>
+              </a:rPr>
+              <a:t>טרנזקציות</a:t>
+            </a:r>
+            <a:r>
+              <a:rPr lang="he-IL" sz="1400" dirty="0">
+                <a:solidFill>
+                  <a:schemeClr val="bg1"/>
+                </a:solidFill>
+                <a:cs typeface="Arial" panose="020B0604020202020204" pitchFamily="34" charset="0"/>
+              </a:rPr>
+              <a:t>, חותם </a:t>
+            </a:r>
+            <a:r>
+              <a:rPr lang="he-IL" sz="1400" dirty="0" err="1">
+                <a:solidFill>
+                  <a:schemeClr val="bg1"/>
+                </a:solidFill>
+                <a:cs typeface="Arial" panose="020B0604020202020204" pitchFamily="34" charset="0"/>
+              </a:rPr>
+              <a:t>טרנזקציות</a:t>
+            </a:r>
+            <a:r>
+              <a:rPr lang="he-IL" sz="1400" dirty="0">
+                <a:solidFill>
+                  <a:schemeClr val="bg1"/>
+                </a:solidFill>
+                <a:cs typeface="Arial" panose="020B0604020202020204" pitchFamily="34" charset="0"/>
+              </a:rPr>
+              <a:t>, מריץ את לולאת הכרייה בסבב בין הכורים</a:t>
+            </a:r>
+            <a:r>
+              <a:rPr lang="en-US" sz="1400" dirty="0">
+                <a:solidFill>
+                  <a:schemeClr val="bg1"/>
+                </a:solidFill>
+                <a:cs typeface="Arial" panose="020B0604020202020204" pitchFamily="34" charset="0"/>
+              </a:rPr>
+              <a:t> A-E </a:t>
+            </a:r>
+            <a:r>
+              <a:rPr lang="he-IL" sz="1400" dirty="0">
+                <a:solidFill>
+                  <a:schemeClr val="bg1"/>
+                </a:solidFill>
+                <a:cs typeface="Arial" panose="020B0604020202020204" pitchFamily="34" charset="0"/>
+              </a:rPr>
+              <a:t>,</a:t>
+            </a:r>
+            <a:br>
+              <a:rPr lang="en-US" sz="1400" dirty="0">
+                <a:solidFill>
+                  <a:schemeClr val="bg1"/>
+                </a:solidFill>
+                <a:cs typeface="Arial" panose="020B0604020202020204" pitchFamily="34" charset="0"/>
+              </a:rPr>
+            </a:br>
+            <a:r>
+              <a:rPr lang="he-IL" sz="1400" dirty="0">
+                <a:solidFill>
+                  <a:schemeClr val="bg1"/>
+                </a:solidFill>
+                <a:cs typeface="Arial" panose="020B0604020202020204" pitchFamily="34" charset="0"/>
+              </a:rPr>
+              <a:t>ומוסיף </a:t>
+            </a:r>
+            <a:r>
+              <a:rPr lang="he-IL" sz="1400" dirty="0" err="1">
+                <a:solidFill>
+                  <a:schemeClr val="bg1"/>
+                </a:solidFill>
+                <a:cs typeface="Arial" panose="020B0604020202020204" pitchFamily="34" charset="0"/>
+              </a:rPr>
+              <a:t>טרנזקציות</a:t>
+            </a:r>
+            <a:r>
+              <a:rPr lang="en" sz="1400" dirty="0" err="1">
+                <a:solidFill>
+                  <a:schemeClr val="bg1"/>
+                </a:solidFill>
+                <a:cs typeface="Arial" panose="020B0604020202020204" pitchFamily="34" charset="0"/>
+              </a:rPr>
+              <a:t>coinbase</a:t>
+            </a:r>
+            <a:r>
+              <a:rPr lang="en" sz="1400" dirty="0">
+                <a:solidFill>
+                  <a:schemeClr val="bg1"/>
+                </a:solidFill>
+                <a:cs typeface="Arial" panose="020B0604020202020204" pitchFamily="34" charset="0"/>
+              </a:rPr>
+              <a:t> </a:t>
+            </a:r>
+            <a:r>
+              <a:rPr lang="he-IL" sz="1400" dirty="0">
+                <a:solidFill>
+                  <a:schemeClr val="bg1"/>
+                </a:solidFill>
+                <a:cs typeface="Arial" panose="020B0604020202020204" pitchFamily="34" charset="0"/>
+              </a:rPr>
+              <a:t> (תגמול + טיפים) לתור.</a:t>
+            </a:r>
+            <a:endParaRPr lang="he-IL" altLang="he-IL" sz="1400" dirty="0">
               <a:solidFill>
                 <a:schemeClr val="bg1"/>
               </a:solidFill>
-              <a:effectLst/>
-              <a:latin typeface="Arial" panose="020B0604020202020204" pitchFamily="34" charset="0"/>
-            </a:endParaRPr>
-          </a:p>
-          <a:p>
-            <a:pPr marL="0" marR="0" lvl="0" indent="0" algn="r" defTabSz="914400" rtl="1" eaLnBrk="0" fontAlgn="base" latinLnBrk="0" hangingPunct="0">
-              <a:lnSpc>
-                <a:spcPct val="100000"/>
-              </a:lnSpc>
-              <a:spcBef>
-                <a:spcPct val="0"/>
-              </a:spcBef>
-              <a:spcAft>
-                <a:spcPct val="0"/>
-              </a:spcAft>
-              <a:buClrTx/>
-              <a:buSzTx/>
-              <a:buFontTx/>
-              <a:buChar char="•"/>
-              <a:tabLst/>
-            </a:pPr>
-            <a:r>
-              <a:rPr kumimoji="0" lang="he-IL" altLang="he-IL" sz="1400" b="0" i="0" u="none" strike="noStrike" cap="none" normalizeH="0" baseline="0" dirty="0" err="1">
-                <a:ln>
-                  <a:noFill/>
-                </a:ln>
-                <a:solidFill>
-                  <a:schemeClr val="bg1"/>
-                </a:solidFill>
-                <a:effectLst/>
-                <a:latin typeface="Arial Unicode MS" panose="020B0604020202020204" pitchFamily="34" charset="-128"/>
-              </a:rPr>
-              <a:t>miner.js</a:t>
-            </a:r>
-            <a:r>
-              <a:rPr kumimoji="0" lang="he-IL" altLang="he-IL" sz="1400" b="0" i="0" u="none" strike="noStrike" cap="none" normalizeH="0" baseline="0" dirty="0">
-                <a:ln>
-                  <a:noFill/>
-                </a:ln>
-                <a:solidFill>
-                  <a:schemeClr val="bg1"/>
-                </a:solidFill>
-                <a:effectLst/>
-              </a:rPr>
-              <a:t> – </a:t>
-            </a:r>
-            <a:r>
-              <a:rPr kumimoji="0" lang="he-IL" altLang="he-IL" sz="1400" b="0" i="0" u="none" strike="noStrike" cap="none" normalizeH="0" baseline="0" dirty="0">
-                <a:ln>
-                  <a:noFill/>
-                </a:ln>
-                <a:solidFill>
-                  <a:schemeClr val="bg1"/>
-                </a:solidFill>
-                <a:effectLst/>
-                <a:cs typeface="Arial" panose="020B0604020202020204" pitchFamily="34" charset="0"/>
-              </a:rPr>
-              <a:t>מממש את לוגיקת הכורה הבודד שבונה בלוק חדש מתוך רשימת </a:t>
-            </a:r>
-            <a:r>
-              <a:rPr kumimoji="0" lang="he-IL" altLang="he-IL" sz="1400" b="0" i="0" u="none" strike="noStrike" cap="none" normalizeH="0" baseline="0" dirty="0" err="1">
-                <a:ln>
-                  <a:noFill/>
-                </a:ln>
-                <a:solidFill>
-                  <a:schemeClr val="bg1"/>
-                </a:solidFill>
-                <a:effectLst/>
-                <a:cs typeface="Arial" panose="020B0604020202020204" pitchFamily="34" charset="0"/>
-              </a:rPr>
-              <a:t>הטרנזקציות</a:t>
-            </a:r>
-            <a:r>
-              <a:rPr kumimoji="0" lang="he-IL" altLang="he-IL" sz="1400" b="0" i="0" u="none" strike="noStrike" cap="none" normalizeH="0" baseline="0" dirty="0">
-                <a:ln>
-                  <a:noFill/>
-                </a:ln>
-                <a:solidFill>
-                  <a:schemeClr val="bg1"/>
-                </a:solidFill>
-                <a:effectLst/>
-              </a:rPr>
-              <a:t>.</a:t>
-            </a:r>
-            <a:endParaRPr kumimoji="0" lang="he-IL" altLang="he-IL" sz="1400" b="0" i="0" u="none" strike="noStrike" cap="none" normalizeH="0" baseline="0" dirty="0">
-              <a:ln>
-                <a:noFill/>
-              </a:ln>
-              <a:solidFill>
-                <a:schemeClr val="bg1"/>
-              </a:solidFill>
-              <a:effectLst/>
-              <a:latin typeface="Arial" panose="020B0604020202020204" pitchFamily="34" charset="0"/>
-            </a:endParaRPr>
-          </a:p>
-          <a:p>
-            <a:pPr marL="0" marR="0" lvl="0" indent="0" algn="r" defTabSz="914400" rtl="1" eaLnBrk="0" fontAlgn="base" latinLnBrk="0" hangingPunct="0">
-              <a:lnSpc>
-                <a:spcPct val="100000"/>
-              </a:lnSpc>
-              <a:spcBef>
-                <a:spcPct val="0"/>
-              </a:spcBef>
-              <a:spcAft>
-                <a:spcPct val="0"/>
-              </a:spcAft>
-              <a:buClrTx/>
-              <a:buSzTx/>
-              <a:buFontTx/>
-              <a:buChar char="•"/>
-              <a:tabLst/>
-            </a:pPr>
-            <a:r>
-              <a:rPr kumimoji="0" lang="he-IL" altLang="he-IL" sz="1400" b="0" i="0" u="none" strike="noStrike" cap="none" normalizeH="0" baseline="0" dirty="0" err="1">
-                <a:ln>
-                  <a:noFill/>
-                </a:ln>
-                <a:solidFill>
-                  <a:schemeClr val="bg1"/>
-                </a:solidFill>
-                <a:effectLst/>
-                <a:latin typeface="Arial Unicode MS" panose="020B0604020202020204" pitchFamily="34" charset="-128"/>
-              </a:rPr>
-              <a:t>minerScheduler.js</a:t>
-            </a:r>
-            <a:r>
-              <a:rPr kumimoji="0" lang="he-IL" altLang="he-IL" sz="1400" b="0" i="0" u="none" strike="noStrike" cap="none" normalizeH="0" baseline="0" dirty="0">
-                <a:ln>
-                  <a:noFill/>
-                </a:ln>
-                <a:solidFill>
-                  <a:schemeClr val="bg1"/>
-                </a:solidFill>
-                <a:effectLst/>
-              </a:rPr>
-              <a:t> – </a:t>
-            </a:r>
-            <a:r>
-              <a:rPr kumimoji="0" lang="he-IL" altLang="he-IL" sz="1400" b="0" i="0" u="none" strike="noStrike" cap="none" normalizeH="0" baseline="0" dirty="0">
-                <a:ln>
-                  <a:noFill/>
-                </a:ln>
-                <a:solidFill>
-                  <a:schemeClr val="bg1"/>
-                </a:solidFill>
-                <a:effectLst/>
-                <a:cs typeface="Arial" panose="020B0604020202020204" pitchFamily="34" charset="0"/>
-              </a:rPr>
-              <a:t>קובע מי הכורה של כל בלוק לפי סבב </a:t>
-            </a:r>
-            <a:r>
-              <a:rPr kumimoji="0" lang="he-IL" altLang="he-IL" sz="1400" b="0" i="0" u="none" strike="noStrike" cap="none" normalizeH="0" baseline="0" dirty="0" err="1">
-                <a:ln>
-                  <a:noFill/>
-                </a:ln>
-                <a:solidFill>
-                  <a:schemeClr val="bg1"/>
-                </a:solidFill>
-                <a:effectLst/>
-                <a:cs typeface="Arial" panose="020B0604020202020204" pitchFamily="34" charset="0"/>
-              </a:rPr>
-              <a:t>ציקלי</a:t>
-            </a:r>
-            <a:r>
-              <a:rPr kumimoji="0" lang="he-IL" altLang="he-IL" sz="1400" b="0" i="0" u="none" strike="noStrike" cap="none" normalizeH="0" baseline="0" dirty="0">
-                <a:ln>
-                  <a:noFill/>
-                </a:ln>
-                <a:solidFill>
-                  <a:schemeClr val="bg1"/>
-                </a:solidFill>
-                <a:effectLst/>
-                <a:cs typeface="Arial" panose="020B0604020202020204" pitchFamily="34" charset="0"/>
-              </a:rPr>
-              <a:t> בין הכורים</a:t>
-            </a:r>
-            <a:r>
-              <a:rPr kumimoji="0" lang="he-IL" altLang="he-IL" sz="1400" b="0" i="0" u="none" strike="noStrike" cap="none" normalizeH="0" baseline="0" dirty="0">
-                <a:ln>
-                  <a:noFill/>
-                </a:ln>
-                <a:solidFill>
-                  <a:schemeClr val="bg1"/>
-                </a:solidFill>
-                <a:effectLst/>
-              </a:rPr>
-              <a:t> </a:t>
-            </a:r>
-            <a:r>
-              <a:rPr kumimoji="0" lang="he-IL" altLang="he-IL" sz="1400" b="0" i="0" u="none" strike="noStrike" cap="none" normalizeH="0" baseline="0" dirty="0" err="1">
-                <a:ln>
-                  <a:noFill/>
-                </a:ln>
-                <a:solidFill>
-                  <a:schemeClr val="bg1"/>
-                </a:solidFill>
-                <a:effectLst/>
-              </a:rPr>
-              <a:t>A</a:t>
-            </a:r>
-            <a:r>
-              <a:rPr kumimoji="0" lang="he-IL" altLang="he-IL" sz="1400" b="0" i="0" u="none" strike="noStrike" cap="none" normalizeH="0" baseline="0" dirty="0">
-                <a:ln>
-                  <a:noFill/>
-                </a:ln>
-                <a:solidFill>
-                  <a:schemeClr val="bg1"/>
-                </a:solidFill>
-                <a:effectLst/>
-              </a:rPr>
-              <a:t>–</a:t>
-            </a:r>
-            <a:r>
-              <a:rPr kumimoji="0" lang="he-IL" altLang="he-IL" sz="1400" b="0" i="0" u="none" strike="noStrike" cap="none" normalizeH="0" baseline="0" dirty="0" err="1">
-                <a:ln>
-                  <a:noFill/>
-                </a:ln>
-                <a:solidFill>
-                  <a:schemeClr val="bg1"/>
-                </a:solidFill>
-                <a:effectLst/>
-              </a:rPr>
-              <a:t>E</a:t>
-            </a:r>
-            <a:r>
-              <a:rPr kumimoji="0" lang="he-IL" altLang="he-IL" sz="1400" b="0" i="0" u="none" strike="noStrike" cap="none" normalizeH="0" baseline="0" dirty="0">
-                <a:ln>
-                  <a:noFill/>
-                </a:ln>
-                <a:solidFill>
-                  <a:schemeClr val="bg1"/>
-                </a:solidFill>
-                <a:effectLst/>
-              </a:rPr>
-              <a:t> (ABCDEAB…).</a:t>
-            </a:r>
-            <a:endParaRPr kumimoji="0" lang="he-IL" altLang="he-IL" sz="1400" b="0" i="0" u="none" strike="noStrike" cap="none" normalizeH="0" baseline="0" dirty="0">
-              <a:ln>
-                <a:noFill/>
-              </a:ln>
-              <a:solidFill>
-                <a:schemeClr val="bg1"/>
-              </a:solidFill>
-              <a:effectLst/>
-              <a:latin typeface="Arial" panose="020B0604020202020204" pitchFamily="34" charset="0"/>
+              <a:latin typeface="Arial Unicode MS" panose="020B0604020202020204" pitchFamily="34" charset="-128"/>
             </a:endParaRPr>
           </a:p>
           <a:p>
